--- a/SVHN_CNN_Presentation.pptx
+++ b/SVHN_CNN_Presentation.pptx
@@ -5,30 +5,30 @@
     <p:sldMasterId id="2147483648" r:id="rId1"/>
   </p:sldMasterIdLst>
   <p:notesMasterIdLst>
-    <p:notesMasterId r:id="rId4"/>
+    <p:notesMasterId r:id="rId21"/>
   </p:notesMasterIdLst>
   <p:sldIdLst>
-    <p:sldId id="256" r:id="rId3"/>
-    <p:sldId id="257" r:id="rId5"/>
-    <p:sldId id="258" r:id="rId6"/>
-    <p:sldId id="259" r:id="rId7"/>
-    <p:sldId id="260" r:id="rId8"/>
-    <p:sldId id="261" r:id="rId9"/>
-    <p:sldId id="262" r:id="rId10"/>
-    <p:sldId id="263" r:id="rId11"/>
-    <p:sldId id="264" r:id="rId12"/>
-    <p:sldId id="265" r:id="rId13"/>
-    <p:sldId id="266" r:id="rId14"/>
-    <p:sldId id="267" r:id="rId15"/>
-    <p:sldId id="268" r:id="rId16"/>
-    <p:sldId id="269" r:id="rId17"/>
-    <p:sldId id="270" r:id="rId18"/>
-    <p:sldId id="271" r:id="rId19"/>
-    <p:sldId id="272" r:id="rId20"/>
-    <p:sldId id="273" r:id="rId21"/>
-    <p:sldId id="274" r:id="rId22"/>
+    <p:sldId id="256" r:id="rId2"/>
+    <p:sldId id="257" r:id="rId3"/>
+    <p:sldId id="258" r:id="rId4"/>
+    <p:sldId id="259" r:id="rId5"/>
+    <p:sldId id="260" r:id="rId6"/>
+    <p:sldId id="261" r:id="rId7"/>
+    <p:sldId id="262" r:id="rId8"/>
+    <p:sldId id="263" r:id="rId9"/>
+    <p:sldId id="264" r:id="rId10"/>
+    <p:sldId id="265" r:id="rId11"/>
+    <p:sldId id="266" r:id="rId12"/>
+    <p:sldId id="267" r:id="rId13"/>
+    <p:sldId id="268" r:id="rId14"/>
+    <p:sldId id="269" r:id="rId15"/>
+    <p:sldId id="270" r:id="rId16"/>
+    <p:sldId id="271" r:id="rId17"/>
+    <p:sldId id="272" r:id="rId18"/>
+    <p:sldId id="273" r:id="rId19"/>
+    <p:sldId id="274" r:id="rId20"/>
   </p:sldIdLst>
-  <p:sldSz cx="9144000" cy="5143500"/>
+  <p:sldSz cx="9144000" cy="5143500" type="screen16x9"/>
   <p:notesSz cx="5143500" cy="9144000"/>
   <p:defaultTextStyle>
     <a:lvl1pPr marL="0" algn="l" defTabSz="914400" rtl="0" eaLnBrk="1" latinLnBrk="0" hangingPunct="1">
@@ -122,6 +122,11 @@
       </a:defRPr>
     </a:lvl9pPr>
   </p:defaultTextStyle>
+  <p:extLst>
+    <p:ext uri="{EFAFB233-063F-42B5-8137-9DF3F51BA10A}">
+      <p15:sldGuideLst xmlns:p15="http://schemas.microsoft.com/office/powerpoint/2012/main"/>
+    </p:ext>
+  </p:extLst>
 </p:presentation>
 </file>
 
@@ -207,6 +212,7 @@
           <a:p>
             <a:fld id="{5282F153-3F37-0F45-9E97-73ACFA13230C}" type="datetimeFigureOut">
               <a:rPr lang="en-US"/>
+              <a:t>5/30/2026</a:t>
             </a:fld>
             <a:endParaRPr lang="en-US"/>
           </a:p>
@@ -273,7 +279,6 @@
               <a:rPr lang="en-US"/>
               <a:t>Click to edit Master text styles</a:t>
             </a:r>
-            <a:endParaRPr lang="en-US"/>
           </a:p>
           <a:p>
             <a:pPr lvl="1"/>
@@ -281,7 +286,6 @@
               <a:rPr lang="en-US"/>
               <a:t>Second level</a:t>
             </a:r>
-            <a:endParaRPr lang="en-US"/>
           </a:p>
           <a:p>
             <a:pPr lvl="2"/>
@@ -289,7 +293,6 @@
               <a:rPr lang="en-US"/>
               <a:t>Third level</a:t>
             </a:r>
-            <a:endParaRPr lang="en-US"/>
           </a:p>
           <a:p>
             <a:pPr lvl="3"/>
@@ -297,7 +300,6 @@
               <a:rPr lang="en-US"/>
               <a:t>Fourth level</a:t>
             </a:r>
-            <a:endParaRPr lang="en-US"/>
           </a:p>
           <a:p>
             <a:pPr lvl="4"/>
@@ -305,7 +307,6 @@
               <a:rPr lang="en-US"/>
               <a:t>Fifth level</a:t>
             </a:r>
-            <a:endParaRPr lang="en-US"/>
           </a:p>
         </p:txBody>
       </p:sp>
@@ -369,6 +370,7 @@
           <a:p>
             <a:fld id="{CE5E9CC1-C706-0F49-92D6-E571CC5EEA8F}" type="slidenum">
               <a:rPr lang="en-US"/>
+              <a:t>‹#›</a:t>
             </a:fld>
             <a:endParaRPr lang="en-US"/>
           </a:p>
@@ -537,6 +539,7 @@
           <a:p>
             <a:fld id="{F7021451-1387-4CA6-816F-3879F97B5CBC}" type="slidenum">
               <a:rPr lang="en-US"/>
+              <a:t>1</a:t>
             </a:fld>
             <a:endParaRPr lang="en-US"/>
           </a:p>
@@ -615,6 +618,7 @@
           <a:p>
             <a:fld id="{F7021451-1387-4CA6-816F-3879F97B5CBC}" type="slidenum">
               <a:rPr lang="en-US"/>
+              <a:t>10</a:t>
             </a:fld>
             <a:endParaRPr lang="en-US"/>
           </a:p>
@@ -693,6 +697,7 @@
           <a:p>
             <a:fld id="{F7021451-1387-4CA6-816F-3879F97B5CBC}" type="slidenum">
               <a:rPr lang="en-US"/>
+              <a:t>11</a:t>
             </a:fld>
             <a:endParaRPr lang="en-US"/>
           </a:p>
@@ -771,6 +776,7 @@
           <a:p>
             <a:fld id="{F7021451-1387-4CA6-816F-3879F97B5CBC}" type="slidenum">
               <a:rPr lang="en-US"/>
+              <a:t>12</a:t>
             </a:fld>
             <a:endParaRPr lang="en-US"/>
           </a:p>
@@ -849,6 +855,7 @@
           <a:p>
             <a:fld id="{F7021451-1387-4CA6-816F-3879F97B5CBC}" type="slidenum">
               <a:rPr lang="en-US"/>
+              <a:t>13</a:t>
             </a:fld>
             <a:endParaRPr lang="en-US"/>
           </a:p>
@@ -927,6 +934,7 @@
           <a:p>
             <a:fld id="{F7021451-1387-4CA6-816F-3879F97B5CBC}" type="slidenum">
               <a:rPr lang="en-US"/>
+              <a:t>14</a:t>
             </a:fld>
             <a:endParaRPr lang="en-US"/>
           </a:p>
@@ -1005,6 +1013,7 @@
           <a:p>
             <a:fld id="{F7021451-1387-4CA6-816F-3879F97B5CBC}" type="slidenum">
               <a:rPr lang="en-US"/>
+              <a:t>15</a:t>
             </a:fld>
             <a:endParaRPr lang="en-US"/>
           </a:p>
@@ -1083,6 +1092,7 @@
           <a:p>
             <a:fld id="{F7021451-1387-4CA6-816F-3879F97B5CBC}" type="slidenum">
               <a:rPr lang="en-US"/>
+              <a:t>16</a:t>
             </a:fld>
             <a:endParaRPr lang="en-US"/>
           </a:p>
@@ -1161,6 +1171,7 @@
           <a:p>
             <a:fld id="{F7021451-1387-4CA6-816F-3879F97B5CBC}" type="slidenum">
               <a:rPr lang="en-US"/>
+              <a:t>17</a:t>
             </a:fld>
             <a:endParaRPr lang="en-US"/>
           </a:p>
@@ -1239,6 +1250,7 @@
           <a:p>
             <a:fld id="{F7021451-1387-4CA6-816F-3879F97B5CBC}" type="slidenum">
               <a:rPr lang="en-US"/>
+              <a:t>18</a:t>
             </a:fld>
             <a:endParaRPr lang="en-US"/>
           </a:p>
@@ -1317,6 +1329,7 @@
           <a:p>
             <a:fld id="{F7021451-1387-4CA6-816F-3879F97B5CBC}" type="slidenum">
               <a:rPr lang="en-US"/>
+              <a:t>19</a:t>
             </a:fld>
             <a:endParaRPr lang="en-US"/>
           </a:p>
@@ -1395,6 +1408,7 @@
           <a:p>
             <a:fld id="{F7021451-1387-4CA6-816F-3879F97B5CBC}" type="slidenum">
               <a:rPr lang="en-US"/>
+              <a:t>2</a:t>
             </a:fld>
             <a:endParaRPr lang="en-US"/>
           </a:p>
@@ -1473,6 +1487,7 @@
           <a:p>
             <a:fld id="{F7021451-1387-4CA6-816F-3879F97B5CBC}" type="slidenum">
               <a:rPr lang="en-US"/>
+              <a:t>3</a:t>
             </a:fld>
             <a:endParaRPr lang="en-US"/>
           </a:p>
@@ -1551,6 +1566,7 @@
           <a:p>
             <a:fld id="{F7021451-1387-4CA6-816F-3879F97B5CBC}" type="slidenum">
               <a:rPr lang="en-US"/>
+              <a:t>4</a:t>
             </a:fld>
             <a:endParaRPr lang="en-US"/>
           </a:p>
@@ -1629,6 +1645,7 @@
           <a:p>
             <a:fld id="{F7021451-1387-4CA6-816F-3879F97B5CBC}" type="slidenum">
               <a:rPr lang="en-US"/>
+              <a:t>5</a:t>
             </a:fld>
             <a:endParaRPr lang="en-US"/>
           </a:p>
@@ -1707,6 +1724,7 @@
           <a:p>
             <a:fld id="{F7021451-1387-4CA6-816F-3879F97B5CBC}" type="slidenum">
               <a:rPr lang="en-US"/>
+              <a:t>6</a:t>
             </a:fld>
             <a:endParaRPr lang="en-US"/>
           </a:p>
@@ -1785,6 +1803,7 @@
           <a:p>
             <a:fld id="{F7021451-1387-4CA6-816F-3879F97B5CBC}" type="slidenum">
               <a:rPr lang="en-US"/>
+              <a:t>7</a:t>
             </a:fld>
             <a:endParaRPr lang="en-US"/>
           </a:p>
@@ -1863,6 +1882,7 @@
           <a:p>
             <a:fld id="{F7021451-1387-4CA6-816F-3879F97B5CBC}" type="slidenum">
               <a:rPr lang="en-US"/>
+              <a:t>8</a:t>
             </a:fld>
             <a:endParaRPr lang="en-US"/>
           </a:p>
@@ -1941,6 +1961,7 @@
           <a:p>
             <a:fld id="{F7021451-1387-4CA6-816F-3879F97B5CBC}" type="slidenum">
               <a:rPr lang="en-US"/>
+              <a:t>9</a:t>
             </a:fld>
             <a:endParaRPr lang="en-US"/>
           </a:p>
@@ -2309,6 +2330,13 @@
             <a:srgbClr val="1F6FBF"/>
           </a:solidFill>
         </p:spPr>
+        <p:txBody>
+          <a:bodyPr/>
+          <a:lstStyle/>
+          <a:p>
+            <a:endParaRPr lang="en-US"/>
+          </a:p>
+        </p:txBody>
       </p:sp>
       <p:sp>
         <p:nvSpPr>
@@ -2328,6 +2356,13 @@
             <a:srgbClr val="4A90D9"/>
           </a:solidFill>
         </p:spPr>
+        <p:txBody>
+          <a:bodyPr/>
+          <a:lstStyle/>
+          <a:p>
+            <a:endParaRPr lang="en-US"/>
+          </a:p>
+        </p:txBody>
       </p:sp>
       <p:sp>
         <p:nvSpPr>
@@ -2423,6 +2458,13 @@
             <a:srgbClr val="4A90D9"/>
           </a:solidFill>
         </p:spPr>
+        <p:txBody>
+          <a:bodyPr/>
+          <a:lstStyle/>
+          <a:p>
+            <a:endParaRPr lang="en-US"/>
+          </a:p>
+        </p:txBody>
       </p:sp>
       <p:sp>
         <p:nvSpPr>
@@ -2482,6 +2524,13 @@
             <a:srgbClr val="4A90D9"/>
           </a:solidFill>
         </p:spPr>
+        <p:txBody>
+          <a:bodyPr/>
+          <a:lstStyle/>
+          <a:p>
+            <a:endParaRPr lang="en-US"/>
+          </a:p>
+        </p:txBody>
       </p:sp>
       <p:sp>
         <p:nvSpPr>
@@ -2629,7 +2678,7 @@
                 <a:ea typeface="Calibri" panose="020F0502020204030204" pitchFamily="34" charset="-122"/>
                 <a:cs typeface="Calibri" panose="020F0502020204030204" pitchFamily="34" charset="-120"/>
               </a:rPr>
-              <a:t>ROY SUDIPTA (20243120070)  ·  ULLAH SAMI (20243120005)</a:t>
+              <a:t>ROY SUDIPTA</a:t>
             </a:r>
             <a:endParaRPr lang="en-US" sz="1200" dirty="0"/>
           </a:p>
@@ -2686,6 +2735,13 @@
             <a:srgbClr val="1A3A5C"/>
           </a:solidFill>
         </p:spPr>
+        <p:txBody>
+          <a:bodyPr/>
+          <a:lstStyle/>
+          <a:p>
+            <a:endParaRPr lang="en-US"/>
+          </a:p>
+        </p:txBody>
       </p:sp>
       <p:sp>
         <p:nvSpPr>
@@ -2743,6 +2799,13 @@
             <a:srgbClr val="B8D4F0"/>
           </a:solidFill>
         </p:spPr>
+        <p:txBody>
+          <a:bodyPr/>
+          <a:lstStyle/>
+          <a:p>
+            <a:endParaRPr lang="en-US"/>
+          </a:p>
+        </p:txBody>
       </p:sp>
       <p:sp>
         <p:nvSpPr>
@@ -2762,6 +2825,13 @@
             <a:srgbClr val="0D1B2A"/>
           </a:solidFill>
         </p:spPr>
+        <p:txBody>
+          <a:bodyPr/>
+          <a:lstStyle/>
+          <a:p>
+            <a:endParaRPr lang="en-US"/>
+          </a:p>
+        </p:txBody>
       </p:sp>
       <p:sp>
         <p:nvSpPr>
@@ -3122,6 +3192,13 @@
             </a:outerShdw>
           </a:effectLst>
         </p:spPr>
+        <p:txBody>
+          <a:bodyPr/>
+          <a:lstStyle/>
+          <a:p>
+            <a:endParaRPr lang="en-US"/>
+          </a:p>
+        </p:txBody>
       </p:sp>
       <p:sp>
         <p:nvSpPr>
@@ -3262,6 +3339,13 @@
             </a:outerShdw>
           </a:effectLst>
         </p:spPr>
+        <p:txBody>
+          <a:bodyPr/>
+          <a:lstStyle/>
+          <a:p>
+            <a:endParaRPr lang="en-US"/>
+          </a:p>
+        </p:txBody>
       </p:sp>
       <p:sp>
         <p:nvSpPr>
@@ -3402,6 +3486,13 @@
             </a:outerShdw>
           </a:effectLst>
         </p:spPr>
+        <p:txBody>
+          <a:bodyPr/>
+          <a:lstStyle/>
+          <a:p>
+            <a:endParaRPr lang="en-US"/>
+          </a:p>
+        </p:txBody>
       </p:sp>
       <p:sp>
         <p:nvSpPr>
@@ -3542,6 +3633,13 @@
             </a:outerShdw>
           </a:effectLst>
         </p:spPr>
+        <p:txBody>
+          <a:bodyPr/>
+          <a:lstStyle/>
+          <a:p>
+            <a:endParaRPr lang="en-US"/>
+          </a:p>
+        </p:txBody>
       </p:sp>
       <p:sp>
         <p:nvSpPr>
@@ -3708,6 +3806,13 @@
             <a:srgbClr val="1A3A5C"/>
           </a:solidFill>
         </p:spPr>
+        <p:txBody>
+          <a:bodyPr/>
+          <a:lstStyle/>
+          <a:p>
+            <a:endParaRPr lang="en-US"/>
+          </a:p>
+        </p:txBody>
       </p:sp>
       <p:sp>
         <p:nvSpPr>
@@ -3765,6 +3870,13 @@
             <a:srgbClr val="B8D4F0"/>
           </a:solidFill>
         </p:spPr>
+        <p:txBody>
+          <a:bodyPr/>
+          <a:lstStyle/>
+          <a:p>
+            <a:endParaRPr lang="en-US"/>
+          </a:p>
+        </p:txBody>
       </p:sp>
       <p:pic>
         <p:nvPicPr>
@@ -3775,7 +3887,7 @@
           <p:nvPr/>
         </p:nvPicPr>
         <p:blipFill>
-          <a:blip r:embed="rId1"/>
+          <a:blip r:embed="rId3"/>
           <a:srcRect/>
           <a:stretch>
             <a:fillRect/>
@@ -3809,6 +3921,13 @@
             <a:srgbClr val="E8F2FC"/>
           </a:solidFill>
         </p:spPr>
+        <p:txBody>
+          <a:bodyPr/>
+          <a:lstStyle/>
+          <a:p>
+            <a:endParaRPr lang="en-US"/>
+          </a:p>
+        </p:txBody>
       </p:sp>
       <p:sp>
         <p:nvSpPr>
@@ -3853,18 +3972,7 @@
                 <a:ea typeface="Calibri" panose="020F0502020204030204" pitchFamily="34" charset="-122"/>
                 <a:cs typeface="Calibri" panose="020F0502020204030204" pitchFamily="34" charset="-120"/>
               </a:rPr>
-              <a:t>Sharp loss drop in first 5 epochs. Test loss converges to 0.279 (better than training loss due to Dropout). </a:t>
-            </a:r>
-            <a:r>
-              <a:rPr lang="en-US" sz="1200" dirty="0">
-                <a:solidFill>
-                  <a:srgbClr val="0D1F35"/>
-                </a:solidFill>
-                <a:latin typeface="Calibri" panose="020F0502020204030204" pitchFamily="34" charset="0"/>
-                <a:ea typeface="Calibri" panose="020F0502020204030204" pitchFamily="34" charset="-122"/>
-                <a:cs typeface="Calibri" panose="020F0502020204030204" pitchFamily="34" charset="-120"/>
-              </a:rPr>
-              <a:t>No overfitting — test loss tracks training loss throughout. Test accuracy consistently leads training accuracy because Dropout masks neurons during training but not at evaluation.</a:t>
+              <a:t>Sharp loss drop in first 5 epochs. Test loss converges to 0.279 (better than training loss due to Dropout). No overfitting — test loss tracks training loss throughout. Test accuracy consistently leads training accuracy because Dropout masks neurons during training but not at evaluation.</a:t>
             </a:r>
             <a:endParaRPr lang="en-US" sz="1200" dirty="0"/>
           </a:p>
@@ -3921,6 +4029,13 @@
             <a:srgbClr val="1A3A5C"/>
           </a:solidFill>
         </p:spPr>
+        <p:txBody>
+          <a:bodyPr/>
+          <a:lstStyle/>
+          <a:p>
+            <a:endParaRPr lang="en-US"/>
+          </a:p>
+        </p:txBody>
       </p:sp>
       <p:sp>
         <p:nvSpPr>
@@ -3978,6 +4093,13 @@
             <a:srgbClr val="B8D4F0"/>
           </a:solidFill>
         </p:spPr>
+        <p:txBody>
+          <a:bodyPr/>
+          <a:lstStyle/>
+          <a:p>
+            <a:endParaRPr lang="en-US"/>
+          </a:p>
+        </p:txBody>
       </p:sp>
       <p:pic>
         <p:nvPicPr>
@@ -3988,7 +4110,7 @@
           <p:nvPr/>
         </p:nvPicPr>
         <p:blipFill>
-          <a:blip r:embed="rId1"/>
+          <a:blip r:embed="rId3"/>
           <a:srcRect/>
           <a:stretch>
             <a:fillRect/>
@@ -4029,6 +4151,13 @@
             </a:outerShdw>
           </a:effectLst>
         </p:spPr>
+        <p:txBody>
+          <a:bodyPr/>
+          <a:lstStyle/>
+          <a:p>
+            <a:endParaRPr lang="en-US"/>
+          </a:p>
+        </p:txBody>
       </p:sp>
       <p:sp>
         <p:nvSpPr>
@@ -4050,6 +4179,13 @@
             </a:schemeClr>
           </a:solidFill>
         </p:spPr>
+        <p:txBody>
+          <a:bodyPr/>
+          <a:lstStyle/>
+          <a:p>
+            <a:endParaRPr lang="en-US"/>
+          </a:p>
+        </p:txBody>
       </p:sp>
       <p:sp>
         <p:nvSpPr>
@@ -4269,6 +4405,13 @@
             <a:srgbClr val="1A3A5C"/>
           </a:solidFill>
         </p:spPr>
+        <p:txBody>
+          <a:bodyPr/>
+          <a:lstStyle/>
+          <a:p>
+            <a:endParaRPr lang="en-US"/>
+          </a:p>
+        </p:txBody>
       </p:sp>
       <p:sp>
         <p:nvSpPr>
@@ -4326,6 +4469,13 @@
             <a:srgbClr val="B8D4F0"/>
           </a:solidFill>
         </p:spPr>
+        <p:txBody>
+          <a:bodyPr/>
+          <a:lstStyle/>
+          <a:p>
+            <a:endParaRPr lang="en-US"/>
+          </a:p>
+        </p:txBody>
       </p:sp>
       <p:pic>
         <p:nvPicPr>
@@ -4336,7 +4486,7 @@
           <p:nvPr/>
         </p:nvPicPr>
         <p:blipFill>
-          <a:blip r:embed="rId1"/>
+          <a:blip r:embed="rId3"/>
           <a:srcRect/>
           <a:stretch>
             <a:fillRect/>
@@ -4370,6 +4520,13 @@
             <a:srgbClr val="E8F2FC"/>
           </a:solidFill>
         </p:spPr>
+        <p:txBody>
+          <a:bodyPr/>
+          <a:lstStyle/>
+          <a:p>
+            <a:endParaRPr lang="en-US"/>
+          </a:p>
+        </p:txBody>
       </p:sp>
       <p:sp>
         <p:nvSpPr>
@@ -4497,6 +4654,13 @@
             <a:srgbClr val="1A3A5C"/>
           </a:solidFill>
         </p:spPr>
+        <p:txBody>
+          <a:bodyPr/>
+          <a:lstStyle/>
+          <a:p>
+            <a:endParaRPr lang="en-US"/>
+          </a:p>
+        </p:txBody>
       </p:sp>
       <p:sp>
         <p:nvSpPr>
@@ -4554,6 +4718,13 @@
             <a:srgbClr val="B8D4F0"/>
           </a:solidFill>
         </p:spPr>
+        <p:txBody>
+          <a:bodyPr/>
+          <a:lstStyle/>
+          <a:p>
+            <a:endParaRPr lang="en-US"/>
+          </a:p>
+        </p:txBody>
       </p:sp>
       <p:pic>
         <p:nvPicPr>
@@ -4564,7 +4735,7 @@
           <p:nvPr/>
         </p:nvPicPr>
         <p:blipFill>
-          <a:blip r:embed="rId1"/>
+          <a:blip r:embed="rId3"/>
           <a:srcRect/>
           <a:stretch>
             <a:fillRect/>
@@ -4605,6 +4776,13 @@
             </a:outerShdw>
           </a:effectLst>
         </p:spPr>
+        <p:txBody>
+          <a:bodyPr/>
+          <a:lstStyle/>
+          <a:p>
+            <a:endParaRPr lang="en-US"/>
+          </a:p>
+        </p:txBody>
       </p:sp>
       <p:sp>
         <p:nvSpPr>
@@ -4626,6 +4804,13 @@
             </a:schemeClr>
           </a:solidFill>
         </p:spPr>
+        <p:txBody>
+          <a:bodyPr/>
+          <a:lstStyle/>
+          <a:p>
+            <a:endParaRPr lang="en-US"/>
+          </a:p>
+        </p:txBody>
       </p:sp>
       <p:sp>
         <p:nvSpPr>
@@ -4863,6 +5048,13 @@
             <a:srgbClr val="1A3A5C"/>
           </a:solidFill>
         </p:spPr>
+        <p:txBody>
+          <a:bodyPr/>
+          <a:lstStyle/>
+          <a:p>
+            <a:endParaRPr lang="en-US"/>
+          </a:p>
+        </p:txBody>
       </p:sp>
       <p:sp>
         <p:nvSpPr>
@@ -4920,6 +5112,13 @@
             <a:srgbClr val="B8D4F0"/>
           </a:solidFill>
         </p:spPr>
+        <p:txBody>
+          <a:bodyPr/>
+          <a:lstStyle/>
+          <a:p>
+            <a:endParaRPr lang="en-US"/>
+          </a:p>
+        </p:txBody>
       </p:sp>
       <p:sp>
         <p:nvSpPr>
@@ -4946,6 +5145,13 @@
             </a:outerShdw>
           </a:effectLst>
         </p:spPr>
+        <p:txBody>
+          <a:bodyPr/>
+          <a:lstStyle/>
+          <a:p>
+            <a:endParaRPr lang="en-US"/>
+          </a:p>
+        </p:txBody>
       </p:sp>
       <p:sp>
         <p:nvSpPr>
@@ -4965,6 +5171,13 @@
             <a:srgbClr val="1F6FBF"/>
           </a:solidFill>
         </p:spPr>
+        <p:txBody>
+          <a:bodyPr/>
+          <a:lstStyle/>
+          <a:p>
+            <a:endParaRPr lang="en-US"/>
+          </a:p>
+        </p:txBody>
       </p:sp>
       <p:sp>
         <p:nvSpPr>
@@ -5067,6 +5280,13 @@
             </a:outerShdw>
           </a:effectLst>
         </p:spPr>
+        <p:txBody>
+          <a:bodyPr/>
+          <a:lstStyle/>
+          <a:p>
+            <a:endParaRPr lang="en-US"/>
+          </a:p>
+        </p:txBody>
       </p:sp>
       <p:sp>
         <p:nvSpPr>
@@ -5086,6 +5306,13 @@
             <a:srgbClr val="1F6FBF"/>
           </a:solidFill>
         </p:spPr>
+        <p:txBody>
+          <a:bodyPr/>
+          <a:lstStyle/>
+          <a:p>
+            <a:endParaRPr lang="en-US"/>
+          </a:p>
+        </p:txBody>
       </p:sp>
       <p:sp>
         <p:nvSpPr>
@@ -5188,6 +5415,13 @@
             </a:outerShdw>
           </a:effectLst>
         </p:spPr>
+        <p:txBody>
+          <a:bodyPr/>
+          <a:lstStyle/>
+          <a:p>
+            <a:endParaRPr lang="en-US"/>
+          </a:p>
+        </p:txBody>
       </p:sp>
       <p:sp>
         <p:nvSpPr>
@@ -5207,6 +5441,13 @@
             <a:srgbClr val="1F6FBF"/>
           </a:solidFill>
         </p:spPr>
+        <p:txBody>
+          <a:bodyPr/>
+          <a:lstStyle/>
+          <a:p>
+            <a:endParaRPr lang="en-US"/>
+          </a:p>
+        </p:txBody>
       </p:sp>
       <p:sp>
         <p:nvSpPr>
@@ -5335,6 +5576,13 @@
             <a:srgbClr val="1A3A5C"/>
           </a:solidFill>
         </p:spPr>
+        <p:txBody>
+          <a:bodyPr/>
+          <a:lstStyle/>
+          <a:p>
+            <a:endParaRPr lang="en-US"/>
+          </a:p>
+        </p:txBody>
       </p:sp>
       <p:sp>
         <p:nvSpPr>
@@ -5392,6 +5640,13 @@
             <a:srgbClr val="B8D4F0"/>
           </a:solidFill>
         </p:spPr>
+        <p:txBody>
+          <a:bodyPr/>
+          <a:lstStyle/>
+          <a:p>
+            <a:endParaRPr lang="en-US"/>
+          </a:p>
+        </p:txBody>
       </p:sp>
       <p:sp>
         <p:nvSpPr>
@@ -5418,6 +5673,13 @@
             </a:outerShdw>
           </a:effectLst>
         </p:spPr>
+        <p:txBody>
+          <a:bodyPr/>
+          <a:lstStyle/>
+          <a:p>
+            <a:endParaRPr lang="en-US"/>
+          </a:p>
+        </p:txBody>
       </p:sp>
       <p:sp>
         <p:nvSpPr>
@@ -5439,6 +5701,13 @@
             </a:schemeClr>
           </a:solidFill>
         </p:spPr>
+        <p:txBody>
+          <a:bodyPr/>
+          <a:lstStyle/>
+          <a:p>
+            <a:endParaRPr lang="en-US"/>
+          </a:p>
+        </p:txBody>
       </p:sp>
       <p:sp>
         <p:nvSpPr>
@@ -5563,6 +5832,13 @@
             </a:outerShdw>
           </a:effectLst>
         </p:spPr>
+        <p:txBody>
+          <a:bodyPr/>
+          <a:lstStyle/>
+          <a:p>
+            <a:endParaRPr lang="en-US"/>
+          </a:p>
+        </p:txBody>
       </p:sp>
       <p:sp>
         <p:nvSpPr>
@@ -5584,6 +5860,13 @@
             </a:schemeClr>
           </a:solidFill>
         </p:spPr>
+        <p:txBody>
+          <a:bodyPr/>
+          <a:lstStyle/>
+          <a:p>
+            <a:endParaRPr lang="en-US"/>
+          </a:p>
+        </p:txBody>
       </p:sp>
       <p:sp>
         <p:nvSpPr>
@@ -5708,6 +5991,13 @@
             </a:outerShdw>
           </a:effectLst>
         </p:spPr>
+        <p:txBody>
+          <a:bodyPr/>
+          <a:lstStyle/>
+          <a:p>
+            <a:endParaRPr lang="en-US"/>
+          </a:p>
+        </p:txBody>
       </p:sp>
       <p:sp>
         <p:nvSpPr>
@@ -5729,6 +6019,13 @@
             </a:schemeClr>
           </a:solidFill>
         </p:spPr>
+        <p:txBody>
+          <a:bodyPr/>
+          <a:lstStyle/>
+          <a:p>
+            <a:endParaRPr lang="en-US"/>
+          </a:p>
+        </p:txBody>
       </p:sp>
       <p:sp>
         <p:nvSpPr>
@@ -5853,6 +6150,13 @@
             </a:outerShdw>
           </a:effectLst>
         </p:spPr>
+        <p:txBody>
+          <a:bodyPr/>
+          <a:lstStyle/>
+          <a:p>
+            <a:endParaRPr lang="en-US"/>
+          </a:p>
+        </p:txBody>
       </p:sp>
       <p:sp>
         <p:nvSpPr>
@@ -5874,6 +6178,13 @@
             </a:schemeClr>
           </a:solidFill>
         </p:spPr>
+        <p:txBody>
+          <a:bodyPr/>
+          <a:lstStyle/>
+          <a:p>
+            <a:endParaRPr lang="en-US"/>
+          </a:p>
+        </p:txBody>
       </p:sp>
       <p:sp>
         <p:nvSpPr>
@@ -5998,6 +6309,13 @@
             </a:outerShdw>
           </a:effectLst>
         </p:spPr>
+        <p:txBody>
+          <a:bodyPr/>
+          <a:lstStyle/>
+          <a:p>
+            <a:endParaRPr lang="en-US"/>
+          </a:p>
+        </p:txBody>
       </p:sp>
       <p:sp>
         <p:nvSpPr>
@@ -6019,6 +6337,13 @@
             </a:schemeClr>
           </a:solidFill>
         </p:spPr>
+        <p:txBody>
+          <a:bodyPr/>
+          <a:lstStyle/>
+          <a:p>
+            <a:endParaRPr lang="en-US"/>
+          </a:p>
+        </p:txBody>
       </p:sp>
       <p:sp>
         <p:nvSpPr>
@@ -6169,6 +6494,13 @@
             <a:srgbClr val="1A3A5C"/>
           </a:solidFill>
         </p:spPr>
+        <p:txBody>
+          <a:bodyPr/>
+          <a:lstStyle/>
+          <a:p>
+            <a:endParaRPr lang="en-US"/>
+          </a:p>
+        </p:txBody>
       </p:sp>
       <p:sp>
         <p:nvSpPr>
@@ -6226,6 +6558,13 @@
             <a:srgbClr val="B8D4F0"/>
           </a:solidFill>
         </p:spPr>
+        <p:txBody>
+          <a:bodyPr/>
+          <a:lstStyle/>
+          <a:p>
+            <a:endParaRPr lang="en-US"/>
+          </a:p>
+        </p:txBody>
       </p:sp>
       <p:sp>
         <p:nvSpPr>
@@ -6247,6 +6586,13 @@
             <a:srgbClr val="E8F2FC"/>
           </a:solidFill>
         </p:spPr>
+        <p:txBody>
+          <a:bodyPr/>
+          <a:lstStyle/>
+          <a:p>
+            <a:endParaRPr lang="en-US"/>
+          </a:p>
+        </p:txBody>
       </p:sp>
       <p:sp>
         <p:nvSpPr>
@@ -6344,6 +6690,13 @@
             <a:srgbClr val="E8F2FC"/>
           </a:solidFill>
         </p:spPr>
+        <p:txBody>
+          <a:bodyPr/>
+          <a:lstStyle/>
+          <a:p>
+            <a:endParaRPr lang="en-US"/>
+          </a:p>
+        </p:txBody>
       </p:sp>
       <p:sp>
         <p:nvSpPr>
@@ -6441,6 +6794,13 @@
             <a:srgbClr val="E8F2FC"/>
           </a:solidFill>
         </p:spPr>
+        <p:txBody>
+          <a:bodyPr/>
+          <a:lstStyle/>
+          <a:p>
+            <a:endParaRPr lang="en-US"/>
+          </a:p>
+        </p:txBody>
       </p:sp>
       <p:sp>
         <p:nvSpPr>
@@ -6538,6 +6898,13 @@
             <a:srgbClr val="E8F2FC"/>
           </a:solidFill>
         </p:spPr>
+        <p:txBody>
+          <a:bodyPr/>
+          <a:lstStyle/>
+          <a:p>
+            <a:endParaRPr lang="en-US"/>
+          </a:p>
+        </p:txBody>
       </p:sp>
       <p:sp>
         <p:nvSpPr>
@@ -6640,6 +7007,13 @@
             </a:outerShdw>
           </a:effectLst>
         </p:spPr>
+        <p:txBody>
+          <a:bodyPr/>
+          <a:lstStyle/>
+          <a:p>
+            <a:endParaRPr lang="en-US"/>
+          </a:p>
+        </p:txBody>
       </p:sp>
       <p:sp>
         <p:nvSpPr>
@@ -6659,6 +7033,13 @@
             <a:srgbClr val="1F6FBF"/>
           </a:solidFill>
         </p:spPr>
+        <p:txBody>
+          <a:bodyPr/>
+          <a:lstStyle/>
+          <a:p>
+            <a:endParaRPr lang="en-US"/>
+          </a:p>
+        </p:txBody>
       </p:sp>
       <p:sp>
         <p:nvSpPr>
@@ -6761,6 +7142,13 @@
             </a:outerShdw>
           </a:effectLst>
         </p:spPr>
+        <p:txBody>
+          <a:bodyPr/>
+          <a:lstStyle/>
+          <a:p>
+            <a:endParaRPr lang="en-US"/>
+          </a:p>
+        </p:txBody>
       </p:sp>
       <p:sp>
         <p:nvSpPr>
@@ -6780,6 +7168,13 @@
             <a:srgbClr val="1F6FBF"/>
           </a:solidFill>
         </p:spPr>
+        <p:txBody>
+          <a:bodyPr/>
+          <a:lstStyle/>
+          <a:p>
+            <a:endParaRPr lang="en-US"/>
+          </a:p>
+        </p:txBody>
       </p:sp>
       <p:sp>
         <p:nvSpPr>
@@ -6882,6 +7277,13 @@
             </a:outerShdw>
           </a:effectLst>
         </p:spPr>
+        <p:txBody>
+          <a:bodyPr/>
+          <a:lstStyle/>
+          <a:p>
+            <a:endParaRPr lang="en-US"/>
+          </a:p>
+        </p:txBody>
       </p:sp>
       <p:sp>
         <p:nvSpPr>
@@ -6901,6 +7303,13 @@
             <a:srgbClr val="1F6FBF"/>
           </a:solidFill>
         </p:spPr>
+        <p:txBody>
+          <a:bodyPr/>
+          <a:lstStyle/>
+          <a:p>
+            <a:endParaRPr lang="en-US"/>
+          </a:p>
+        </p:txBody>
       </p:sp>
       <p:sp>
         <p:nvSpPr>
@@ -7003,6 +7412,13 @@
             </a:outerShdw>
           </a:effectLst>
         </p:spPr>
+        <p:txBody>
+          <a:bodyPr/>
+          <a:lstStyle/>
+          <a:p>
+            <a:endParaRPr lang="en-US"/>
+          </a:p>
+        </p:txBody>
       </p:sp>
       <p:sp>
         <p:nvSpPr>
@@ -7022,6 +7438,13 @@
             <a:srgbClr val="1F6FBF"/>
           </a:solidFill>
         </p:spPr>
+        <p:txBody>
+          <a:bodyPr/>
+          <a:lstStyle/>
+          <a:p>
+            <a:endParaRPr lang="en-US"/>
+          </a:p>
+        </p:txBody>
       </p:sp>
       <p:sp>
         <p:nvSpPr>
@@ -7150,6 +7573,13 @@
             <a:srgbClr val="1A3A5C"/>
           </a:solidFill>
         </p:spPr>
+        <p:txBody>
+          <a:bodyPr/>
+          <a:lstStyle/>
+          <a:p>
+            <a:endParaRPr lang="en-US"/>
+          </a:p>
+        </p:txBody>
       </p:sp>
       <p:sp>
         <p:nvSpPr>
@@ -7207,6 +7637,13 @@
             <a:srgbClr val="B8D4F0"/>
           </a:solidFill>
         </p:spPr>
+        <p:txBody>
+          <a:bodyPr/>
+          <a:lstStyle/>
+          <a:p>
+            <a:endParaRPr lang="en-US"/>
+          </a:p>
+        </p:txBody>
       </p:sp>
       <p:sp>
         <p:nvSpPr>
@@ -7233,6 +7670,13 @@
             </a:outerShdw>
           </a:effectLst>
         </p:spPr>
+        <p:txBody>
+          <a:bodyPr/>
+          <a:lstStyle/>
+          <a:p>
+            <a:endParaRPr lang="en-US"/>
+          </a:p>
+        </p:txBody>
       </p:sp>
       <p:sp>
         <p:nvSpPr>
@@ -7252,6 +7696,13 @@
             <a:srgbClr val="1F6FBF"/>
           </a:solidFill>
         </p:spPr>
+        <p:txBody>
+          <a:bodyPr/>
+          <a:lstStyle/>
+          <a:p>
+            <a:endParaRPr lang="en-US"/>
+          </a:p>
+        </p:txBody>
       </p:sp>
       <p:sp>
         <p:nvSpPr>
@@ -7347,6 +7798,13 @@
             <a:srgbClr val="B8D4F0"/>
           </a:solidFill>
         </p:spPr>
+        <p:txBody>
+          <a:bodyPr/>
+          <a:lstStyle/>
+          <a:p>
+            <a:endParaRPr lang="en-US"/>
+          </a:p>
+        </p:txBody>
       </p:sp>
       <p:sp>
         <p:nvSpPr>
@@ -7373,6 +7831,13 @@
             </a:outerShdw>
           </a:effectLst>
         </p:spPr>
+        <p:txBody>
+          <a:bodyPr/>
+          <a:lstStyle/>
+          <a:p>
+            <a:endParaRPr lang="en-US"/>
+          </a:p>
+        </p:txBody>
       </p:sp>
       <p:sp>
         <p:nvSpPr>
@@ -7392,6 +7857,13 @@
             <a:srgbClr val="1F6FBF"/>
           </a:solidFill>
         </p:spPr>
+        <p:txBody>
+          <a:bodyPr/>
+          <a:lstStyle/>
+          <a:p>
+            <a:endParaRPr lang="en-US"/>
+          </a:p>
+        </p:txBody>
       </p:sp>
       <p:sp>
         <p:nvSpPr>
@@ -7487,6 +7959,13 @@
             <a:srgbClr val="B8D4F0"/>
           </a:solidFill>
         </p:spPr>
+        <p:txBody>
+          <a:bodyPr/>
+          <a:lstStyle/>
+          <a:p>
+            <a:endParaRPr lang="en-US"/>
+          </a:p>
+        </p:txBody>
       </p:sp>
       <p:sp>
         <p:nvSpPr>
@@ -7513,6 +7992,13 @@
             </a:outerShdw>
           </a:effectLst>
         </p:spPr>
+        <p:txBody>
+          <a:bodyPr/>
+          <a:lstStyle/>
+          <a:p>
+            <a:endParaRPr lang="en-US"/>
+          </a:p>
+        </p:txBody>
       </p:sp>
       <p:sp>
         <p:nvSpPr>
@@ -7532,6 +8018,13 @@
             <a:srgbClr val="1F6FBF"/>
           </a:solidFill>
         </p:spPr>
+        <p:txBody>
+          <a:bodyPr/>
+          <a:lstStyle/>
+          <a:p>
+            <a:endParaRPr lang="en-US"/>
+          </a:p>
+        </p:txBody>
       </p:sp>
       <p:sp>
         <p:nvSpPr>
@@ -7627,6 +8120,13 @@
             <a:srgbClr val="B8D4F0"/>
           </a:solidFill>
         </p:spPr>
+        <p:txBody>
+          <a:bodyPr/>
+          <a:lstStyle/>
+          <a:p>
+            <a:endParaRPr lang="en-US"/>
+          </a:p>
+        </p:txBody>
       </p:sp>
       <p:sp>
         <p:nvSpPr>
@@ -7653,6 +8153,13 @@
             </a:outerShdw>
           </a:effectLst>
         </p:spPr>
+        <p:txBody>
+          <a:bodyPr/>
+          <a:lstStyle/>
+          <a:p>
+            <a:endParaRPr lang="en-US"/>
+          </a:p>
+        </p:txBody>
       </p:sp>
       <p:sp>
         <p:nvSpPr>
@@ -7672,6 +8179,13 @@
             <a:srgbClr val="1F6FBF"/>
           </a:solidFill>
         </p:spPr>
+        <p:txBody>
+          <a:bodyPr/>
+          <a:lstStyle/>
+          <a:p>
+            <a:endParaRPr lang="en-US"/>
+          </a:p>
+        </p:txBody>
       </p:sp>
       <p:sp>
         <p:nvSpPr>
@@ -7767,6 +8281,13 @@
             <a:srgbClr val="B8D4F0"/>
           </a:solidFill>
         </p:spPr>
+        <p:txBody>
+          <a:bodyPr/>
+          <a:lstStyle/>
+          <a:p>
+            <a:endParaRPr lang="en-US"/>
+          </a:p>
+        </p:txBody>
       </p:sp>
       <p:sp>
         <p:nvSpPr>
@@ -7793,6 +8314,13 @@
             </a:outerShdw>
           </a:effectLst>
         </p:spPr>
+        <p:txBody>
+          <a:bodyPr/>
+          <a:lstStyle/>
+          <a:p>
+            <a:endParaRPr lang="en-US"/>
+          </a:p>
+        </p:txBody>
       </p:sp>
       <p:sp>
         <p:nvSpPr>
@@ -7812,6 +8340,13 @@
             <a:srgbClr val="1F6FBF"/>
           </a:solidFill>
         </p:spPr>
+        <p:txBody>
+          <a:bodyPr/>
+          <a:lstStyle/>
+          <a:p>
+            <a:endParaRPr lang="en-US"/>
+          </a:p>
+        </p:txBody>
       </p:sp>
       <p:sp>
         <p:nvSpPr>
@@ -7907,6 +8442,13 @@
             <a:srgbClr val="B8D4F0"/>
           </a:solidFill>
         </p:spPr>
+        <p:txBody>
+          <a:bodyPr/>
+          <a:lstStyle/>
+          <a:p>
+            <a:endParaRPr lang="en-US"/>
+          </a:p>
+        </p:txBody>
       </p:sp>
     </p:spTree>
   </p:cSld>
@@ -8014,7 +8556,7 @@
         </p:nvSpPr>
         <p:spPr>
           <a:xfrm>
-            <a:off x="3200400" y="1755648"/>
+            <a:off x="3200400" y="1342570"/>
             <a:ext cx="2743200" cy="36576"/>
           </a:xfrm>
           <a:prstGeom prst="rect">
@@ -8024,6 +8566,13 @@
             <a:srgbClr val="4A90D9"/>
           </a:solidFill>
         </p:spPr>
+        <p:txBody>
+          <a:bodyPr/>
+          <a:lstStyle/>
+          <a:p>
+            <a:endParaRPr lang="en-US"/>
+          </a:p>
+        </p:txBody>
       </p:sp>
       <p:sp>
         <p:nvSpPr>
@@ -8033,7 +8582,7 @@
         </p:nvSpPr>
         <p:spPr>
           <a:xfrm>
-            <a:off x="365760" y="1920240"/>
+            <a:off x="457200" y="2508386"/>
             <a:ext cx="1920240" cy="822960"/>
           </a:xfrm>
           <a:prstGeom prst="rect">
@@ -8043,6 +8592,13 @@
             <a:srgbClr val="1F6FBF"/>
           </a:solidFill>
         </p:spPr>
+        <p:txBody>
+          <a:bodyPr/>
+          <a:lstStyle/>
+          <a:p>
+            <a:endParaRPr lang="en-US"/>
+          </a:p>
+        </p:txBody>
       </p:sp>
       <p:sp>
         <p:nvSpPr>
@@ -8052,7 +8608,7 @@
         </p:nvSpPr>
         <p:spPr>
           <a:xfrm>
-            <a:off x="365760" y="1938528"/>
+            <a:off x="457200" y="2526674"/>
             <a:ext cx="1920240" cy="457200"/>
           </a:xfrm>
           <a:prstGeom prst="rect">
@@ -8090,7 +8646,7 @@
         </p:nvSpPr>
         <p:spPr>
           <a:xfrm>
-            <a:off x="365760" y="2395728"/>
+            <a:off x="457200" y="2983874"/>
             <a:ext cx="1920240" cy="301752"/>
           </a:xfrm>
           <a:prstGeom prst="rect">
@@ -8128,7 +8684,7 @@
         </p:nvSpPr>
         <p:spPr>
           <a:xfrm>
-            <a:off x="2468880" y="1920240"/>
+            <a:off x="2560320" y="2508386"/>
             <a:ext cx="1920240" cy="822960"/>
           </a:xfrm>
           <a:prstGeom prst="rect">
@@ -8138,6 +8694,13 @@
             <a:srgbClr val="1F6FBF"/>
           </a:solidFill>
         </p:spPr>
+        <p:txBody>
+          <a:bodyPr/>
+          <a:lstStyle/>
+          <a:p>
+            <a:endParaRPr lang="en-US"/>
+          </a:p>
+        </p:txBody>
       </p:sp>
       <p:sp>
         <p:nvSpPr>
@@ -8147,7 +8710,7 @@
         </p:nvSpPr>
         <p:spPr>
           <a:xfrm>
-            <a:off x="2468880" y="1938528"/>
+            <a:off x="2560320" y="2526674"/>
             <a:ext cx="1920240" cy="457200"/>
           </a:xfrm>
           <a:prstGeom prst="rect">
@@ -8185,7 +8748,7 @@
         </p:nvSpPr>
         <p:spPr>
           <a:xfrm>
-            <a:off x="2468880" y="2395728"/>
+            <a:off x="2560320" y="2983874"/>
             <a:ext cx="1920240" cy="301752"/>
           </a:xfrm>
           <a:prstGeom prst="rect">
@@ -8223,7 +8786,7 @@
         </p:nvSpPr>
         <p:spPr>
           <a:xfrm>
-            <a:off x="4572000" y="1920240"/>
+            <a:off x="4663440" y="2508386"/>
             <a:ext cx="1920240" cy="822960"/>
           </a:xfrm>
           <a:prstGeom prst="rect">
@@ -8233,6 +8796,13 @@
             <a:srgbClr val="1F6FBF"/>
           </a:solidFill>
         </p:spPr>
+        <p:txBody>
+          <a:bodyPr/>
+          <a:lstStyle/>
+          <a:p>
+            <a:endParaRPr lang="en-US"/>
+          </a:p>
+        </p:txBody>
       </p:sp>
       <p:sp>
         <p:nvSpPr>
@@ -8242,7 +8812,7 @@
         </p:nvSpPr>
         <p:spPr>
           <a:xfrm>
-            <a:off x="4572000" y="1938528"/>
+            <a:off x="4663440" y="2526674"/>
             <a:ext cx="1920240" cy="457200"/>
           </a:xfrm>
           <a:prstGeom prst="rect">
@@ -8280,7 +8850,7 @@
         </p:nvSpPr>
         <p:spPr>
           <a:xfrm>
-            <a:off x="4572000" y="2395728"/>
+            <a:off x="4663440" y="2983874"/>
             <a:ext cx="1920240" cy="301752"/>
           </a:xfrm>
           <a:prstGeom prst="rect">
@@ -8318,7 +8888,7 @@
         </p:nvSpPr>
         <p:spPr>
           <a:xfrm>
-            <a:off x="6675120" y="1920240"/>
+            <a:off x="6766560" y="2508386"/>
             <a:ext cx="1920240" cy="822960"/>
           </a:xfrm>
           <a:prstGeom prst="rect">
@@ -8328,6 +8898,13 @@
             <a:srgbClr val="1F6FBF"/>
           </a:solidFill>
         </p:spPr>
+        <p:txBody>
+          <a:bodyPr/>
+          <a:lstStyle/>
+          <a:p>
+            <a:endParaRPr lang="en-US"/>
+          </a:p>
+        </p:txBody>
       </p:sp>
       <p:sp>
         <p:nvSpPr>
@@ -8337,7 +8914,7 @@
         </p:nvSpPr>
         <p:spPr>
           <a:xfrm>
-            <a:off x="6675120" y="1938528"/>
+            <a:off x="6766560" y="2526674"/>
             <a:ext cx="1920240" cy="457200"/>
           </a:xfrm>
           <a:prstGeom prst="rect">
@@ -8375,7 +8952,7 @@
         </p:nvSpPr>
         <p:spPr>
           <a:xfrm>
-            <a:off x="6675120" y="2395728"/>
+            <a:off x="6766560" y="2983874"/>
             <a:ext cx="1920240" cy="301752"/>
           </a:xfrm>
           <a:prstGeom prst="rect">
@@ -8405,854 +8982,6 @@
           </a:p>
         </p:txBody>
       </p:sp>
-      <p:graphicFrame>
-        <p:nvGraphicFramePr>
-          <p:cNvPr id="20" name="Table 0"/>
-          <p:cNvGraphicFramePr>
-            <a:graphicFrameLocks noGrp="1"/>
-          </p:cNvGraphicFramePr>
-          <p:nvPr/>
-        </p:nvGraphicFramePr>
-        <p:xfrm>
-          <a:off x="365760" y="2880360"/>
-          <a:ext cx="8412480" cy="1417320"/>
-        </p:xfrm>
-        <a:graphic>
-          <a:graphicData uri="http://schemas.openxmlformats.org/drawingml/2006/table">
-            <a:tbl>
-              <a:tblPr/>
-              <a:tblGrid>
-                <a:gridCol w="2148840"/>
-                <a:gridCol w="1691640"/>
-                <a:gridCol w="1097280"/>
-                <a:gridCol w="3474720"/>
-              </a:tblGrid>
-              <a:tr h="457200">
-                <a:tc>
-                  <a:txBody>
-                    <a:bodyPr/>
-                    <a:lstStyle/>
-                    <a:p>
-                      <a:pPr marL="0" indent="0" algn="ctr">
-                        <a:buNone/>
-                      </a:pPr>
-                      <a:r>
-                        <a:rPr lang="en-US" sz="1150" b="1" dirty="0">
-                          <a:solidFill>
-                            <a:srgbClr val="FFFFFF"/>
-                          </a:solidFill>
-                          <a:latin typeface="Calibri" panose="020F0502020204030204" pitchFamily="34" charset="0"/>
-                          <a:ea typeface="Calibri" panose="020F0502020204030204" pitchFamily="34" charset="-122"/>
-                          <a:cs typeface="Calibri" panose="020F0502020204030204" pitchFamily="34" charset="-120"/>
-                        </a:rPr>
-                        <a:t>Member</a:t>
-                      </a:r>
-                      <a:endParaRPr lang="en-US" sz="1150" dirty="0">
-                        <a:latin typeface="Calibri" panose="020F0502020204030204" pitchFamily="34" charset="0"/>
-                        <a:ea typeface="Calibri" panose="020F0502020204030204" pitchFamily="34" charset="0"/>
-                        <a:cs typeface="Calibri" panose="020F0502020204030204" pitchFamily="34" charset="0"/>
-                      </a:endParaRPr>
-                    </a:p>
-                  </a:txBody>
-                  <a:tcPr anchor="ctr">
-                    <a:lnL w="6350" cap="flat" cmpd="sng" algn="ctr">
-                      <a:solidFill>
-                        <a:srgbClr val="1F6FBF"/>
-                      </a:solidFill>
-                      <a:prstDash val="solid"/>
-                      <a:round/>
-                      <a:headEnd type="none" w="med" len="med"/>
-                      <a:tailEnd type="none" w="med" len="med"/>
-                    </a:lnL>
-                    <a:lnR w="6350" cap="flat" cmpd="sng" algn="ctr">
-                      <a:solidFill>
-                        <a:srgbClr val="1F6FBF"/>
-                      </a:solidFill>
-                      <a:prstDash val="solid"/>
-                      <a:round/>
-                      <a:headEnd type="none" w="med" len="med"/>
-                      <a:tailEnd type="none" w="med" len="med"/>
-                    </a:lnR>
-                    <a:lnT w="6350" cap="flat" cmpd="sng" algn="ctr">
-                      <a:solidFill>
-                        <a:srgbClr val="1F6FBF"/>
-                      </a:solidFill>
-                      <a:prstDash val="solid"/>
-                      <a:round/>
-                      <a:headEnd type="none" w="med" len="med"/>
-                      <a:tailEnd type="none" w="med" len="med"/>
-                    </a:lnT>
-                    <a:lnB w="6350" cap="flat" cmpd="sng" algn="ctr">
-                      <a:solidFill>
-                        <a:srgbClr val="1F6FBF"/>
-                      </a:solidFill>
-                      <a:prstDash val="solid"/>
-                      <a:round/>
-                      <a:headEnd type="none" w="med" len="med"/>
-                      <a:tailEnd type="none" w="med" len="med"/>
-                    </a:lnB>
-                    <a:solidFill>
-                      <a:srgbClr val="0D1F35"/>
-                    </a:solidFill>
-                  </a:tcPr>
-                </a:tc>
-                <a:tc>
-                  <a:txBody>
-                    <a:bodyPr/>
-                    <a:lstStyle/>
-                    <a:p>
-                      <a:pPr marL="0" indent="0" algn="ctr">
-                        <a:buNone/>
-                      </a:pPr>
-                      <a:r>
-                        <a:rPr lang="en-US" sz="1150" b="1" dirty="0">
-                          <a:solidFill>
-                            <a:srgbClr val="FFFFFF"/>
-                          </a:solidFill>
-                          <a:latin typeface="Calibri" panose="020F0502020204030204" pitchFamily="34" charset="0"/>
-                          <a:ea typeface="Calibri" panose="020F0502020204030204" pitchFamily="34" charset="-122"/>
-                          <a:cs typeface="Calibri" panose="020F0502020204030204" pitchFamily="34" charset="-120"/>
-                        </a:rPr>
-                        <a:t>Student ID</a:t>
-                      </a:r>
-                      <a:endParaRPr lang="en-US" sz="1150" dirty="0">
-                        <a:latin typeface="Calibri" panose="020F0502020204030204" pitchFamily="34" charset="0"/>
-                        <a:ea typeface="Calibri" panose="020F0502020204030204" pitchFamily="34" charset="0"/>
-                        <a:cs typeface="Calibri" panose="020F0502020204030204" pitchFamily="34" charset="0"/>
-                      </a:endParaRPr>
-                    </a:p>
-                  </a:txBody>
-                  <a:tcPr anchor="ctr">
-                    <a:lnL w="6350" cap="flat" cmpd="sng" algn="ctr">
-                      <a:solidFill>
-                        <a:srgbClr val="1F6FBF"/>
-                      </a:solidFill>
-                      <a:prstDash val="solid"/>
-                      <a:round/>
-                      <a:headEnd type="none" w="med" len="med"/>
-                      <a:tailEnd type="none" w="med" len="med"/>
-                    </a:lnL>
-                    <a:lnR w="6350" cap="flat" cmpd="sng" algn="ctr">
-                      <a:solidFill>
-                        <a:srgbClr val="1F6FBF"/>
-                      </a:solidFill>
-                      <a:prstDash val="solid"/>
-                      <a:round/>
-                      <a:headEnd type="none" w="med" len="med"/>
-                      <a:tailEnd type="none" w="med" len="med"/>
-                    </a:lnR>
-                    <a:lnT w="6350" cap="flat" cmpd="sng" algn="ctr">
-                      <a:solidFill>
-                        <a:srgbClr val="1F6FBF"/>
-                      </a:solidFill>
-                      <a:prstDash val="solid"/>
-                      <a:round/>
-                      <a:headEnd type="none" w="med" len="med"/>
-                      <a:tailEnd type="none" w="med" len="med"/>
-                    </a:lnT>
-                    <a:lnB w="6350" cap="flat" cmpd="sng" algn="ctr">
-                      <a:solidFill>
-                        <a:srgbClr val="1F6FBF"/>
-                      </a:solidFill>
-                      <a:prstDash val="solid"/>
-                      <a:round/>
-                      <a:headEnd type="none" w="med" len="med"/>
-                      <a:tailEnd type="none" w="med" len="med"/>
-                    </a:lnB>
-                    <a:solidFill>
-                      <a:srgbClr val="0D1F35"/>
-                    </a:solidFill>
-                  </a:tcPr>
-                </a:tc>
-                <a:tc>
-                  <a:txBody>
-                    <a:bodyPr/>
-                    <a:lstStyle/>
-                    <a:p>
-                      <a:pPr marL="0" indent="0" algn="ctr">
-                        <a:buNone/>
-                      </a:pPr>
-                      <a:r>
-                        <a:rPr lang="en-US" sz="1150" b="1" dirty="0">
-                          <a:solidFill>
-                            <a:srgbClr val="FFFFFF"/>
-                          </a:solidFill>
-                          <a:latin typeface="Calibri" panose="020F0502020204030204" pitchFamily="34" charset="0"/>
-                          <a:ea typeface="Calibri" panose="020F0502020204030204" pitchFamily="34" charset="-122"/>
-                          <a:cs typeface="Calibri" panose="020F0502020204030204" pitchFamily="34" charset="-120"/>
-                        </a:rPr>
-                        <a:t>Contribution</a:t>
-                      </a:r>
-                      <a:endParaRPr lang="en-US" sz="1150" dirty="0">
-                        <a:latin typeface="Calibri" panose="020F0502020204030204" pitchFamily="34" charset="0"/>
-                        <a:ea typeface="Calibri" panose="020F0502020204030204" pitchFamily="34" charset="0"/>
-                        <a:cs typeface="Calibri" panose="020F0502020204030204" pitchFamily="34" charset="0"/>
-                      </a:endParaRPr>
-                    </a:p>
-                  </a:txBody>
-                  <a:tcPr anchor="ctr">
-                    <a:lnL w="6350" cap="flat" cmpd="sng" algn="ctr">
-                      <a:solidFill>
-                        <a:srgbClr val="1F6FBF"/>
-                      </a:solidFill>
-                      <a:prstDash val="solid"/>
-                      <a:round/>
-                      <a:headEnd type="none" w="med" len="med"/>
-                      <a:tailEnd type="none" w="med" len="med"/>
-                    </a:lnL>
-                    <a:lnR w="6350" cap="flat" cmpd="sng" algn="ctr">
-                      <a:solidFill>
-                        <a:srgbClr val="1F6FBF"/>
-                      </a:solidFill>
-                      <a:prstDash val="solid"/>
-                      <a:round/>
-                      <a:headEnd type="none" w="med" len="med"/>
-                      <a:tailEnd type="none" w="med" len="med"/>
-                    </a:lnR>
-                    <a:lnT w="6350" cap="flat" cmpd="sng" algn="ctr">
-                      <a:solidFill>
-                        <a:srgbClr val="1F6FBF"/>
-                      </a:solidFill>
-                      <a:prstDash val="solid"/>
-                      <a:round/>
-                      <a:headEnd type="none" w="med" len="med"/>
-                      <a:tailEnd type="none" w="med" len="med"/>
-                    </a:lnT>
-                    <a:lnB w="6350" cap="flat" cmpd="sng" algn="ctr">
-                      <a:solidFill>
-                        <a:srgbClr val="1F6FBF"/>
-                      </a:solidFill>
-                      <a:prstDash val="solid"/>
-                      <a:round/>
-                      <a:headEnd type="none" w="med" len="med"/>
-                      <a:tailEnd type="none" w="med" len="med"/>
-                    </a:lnB>
-                    <a:solidFill>
-                      <a:srgbClr val="0D1F35"/>
-                    </a:solidFill>
-                  </a:tcPr>
-                </a:tc>
-                <a:tc>
-                  <a:txBody>
-                    <a:bodyPr/>
-                    <a:lstStyle/>
-                    <a:p>
-                      <a:pPr marL="0" indent="0" algn="ctr">
-                        <a:buNone/>
-                      </a:pPr>
-                      <a:r>
-                        <a:rPr lang="en-US" sz="1150" b="1" dirty="0">
-                          <a:solidFill>
-                            <a:srgbClr val="FFFFFF"/>
-                          </a:solidFill>
-                          <a:latin typeface="Calibri" panose="020F0502020204030204" pitchFamily="34" charset="0"/>
-                          <a:ea typeface="Calibri" panose="020F0502020204030204" pitchFamily="34" charset="-122"/>
-                          <a:cs typeface="Calibri" panose="020F0502020204030204" pitchFamily="34" charset="-120"/>
-                        </a:rPr>
-                        <a:t>Responsibilities</a:t>
-                      </a:r>
-                      <a:endParaRPr lang="en-US" sz="1150" dirty="0">
-                        <a:latin typeface="Calibri" panose="020F0502020204030204" pitchFamily="34" charset="0"/>
-                        <a:ea typeface="Calibri" panose="020F0502020204030204" pitchFamily="34" charset="0"/>
-                        <a:cs typeface="Calibri" panose="020F0502020204030204" pitchFamily="34" charset="0"/>
-                      </a:endParaRPr>
-                    </a:p>
-                  </a:txBody>
-                  <a:tcPr anchor="ctr">
-                    <a:lnL w="6350" cap="flat" cmpd="sng" algn="ctr">
-                      <a:solidFill>
-                        <a:srgbClr val="1F6FBF"/>
-                      </a:solidFill>
-                      <a:prstDash val="solid"/>
-                      <a:round/>
-                      <a:headEnd type="none" w="med" len="med"/>
-                      <a:tailEnd type="none" w="med" len="med"/>
-                    </a:lnL>
-                    <a:lnR w="6350" cap="flat" cmpd="sng" algn="ctr">
-                      <a:solidFill>
-                        <a:srgbClr val="1F6FBF"/>
-                      </a:solidFill>
-                      <a:prstDash val="solid"/>
-                      <a:round/>
-                      <a:headEnd type="none" w="med" len="med"/>
-                      <a:tailEnd type="none" w="med" len="med"/>
-                    </a:lnR>
-                    <a:lnT w="6350" cap="flat" cmpd="sng" algn="ctr">
-                      <a:solidFill>
-                        <a:srgbClr val="1F6FBF"/>
-                      </a:solidFill>
-                      <a:prstDash val="solid"/>
-                      <a:round/>
-                      <a:headEnd type="none" w="med" len="med"/>
-                      <a:tailEnd type="none" w="med" len="med"/>
-                    </a:lnT>
-                    <a:lnB w="6350" cap="flat" cmpd="sng" algn="ctr">
-                      <a:solidFill>
-                        <a:srgbClr val="1F6FBF"/>
-                      </a:solidFill>
-                      <a:prstDash val="solid"/>
-                      <a:round/>
-                      <a:headEnd type="none" w="med" len="med"/>
-                      <a:tailEnd type="none" w="med" len="med"/>
-                    </a:lnB>
-                    <a:solidFill>
-                      <a:srgbClr val="0D1F35"/>
-                    </a:solidFill>
-                  </a:tcPr>
-                </a:tc>
-              </a:tr>
-              <a:tr h="457200">
-                <a:tc>
-                  <a:txBody>
-                    <a:bodyPr/>
-                    <a:lstStyle/>
-                    <a:p>
-                      <a:pPr marL="0" indent="0" algn="ctr">
-                        <a:buNone/>
-                      </a:pPr>
-                      <a:r>
-                        <a:rPr lang="en-US" sz="1150" dirty="0">
-                          <a:solidFill>
-                            <a:srgbClr val="FFFFFF"/>
-                          </a:solidFill>
-                          <a:latin typeface="Calibri" panose="020F0502020204030204" pitchFamily="34" charset="0"/>
-                          <a:ea typeface="Calibri" panose="020F0502020204030204" pitchFamily="34" charset="-122"/>
-                          <a:cs typeface="Calibri" panose="020F0502020204030204" pitchFamily="34" charset="-120"/>
-                        </a:rPr>
-                        <a:t>ROY SUDIPTA (Lead)</a:t>
-                      </a:r>
-                      <a:endParaRPr lang="en-US" sz="1150" dirty="0">
-                        <a:latin typeface="Calibri" panose="020F0502020204030204" pitchFamily="34" charset="0"/>
-                        <a:ea typeface="Calibri" panose="020F0502020204030204" pitchFamily="34" charset="0"/>
-                        <a:cs typeface="Calibri" panose="020F0502020204030204" pitchFamily="34" charset="0"/>
-                      </a:endParaRPr>
-                    </a:p>
-                  </a:txBody>
-                  <a:tcPr anchor="ctr">
-                    <a:lnL w="6350" cap="flat" cmpd="sng" algn="ctr">
-                      <a:solidFill>
-                        <a:srgbClr val="1F6FBF"/>
-                      </a:solidFill>
-                      <a:prstDash val="solid"/>
-                      <a:round/>
-                      <a:headEnd type="none" w="med" len="med"/>
-                      <a:tailEnd type="none" w="med" len="med"/>
-                    </a:lnL>
-                    <a:lnR w="6350" cap="flat" cmpd="sng" algn="ctr">
-                      <a:solidFill>
-                        <a:srgbClr val="1F6FBF"/>
-                      </a:solidFill>
-                      <a:prstDash val="solid"/>
-                      <a:round/>
-                      <a:headEnd type="none" w="med" len="med"/>
-                      <a:tailEnd type="none" w="med" len="med"/>
-                    </a:lnR>
-                    <a:lnT w="6350" cap="flat" cmpd="sng" algn="ctr">
-                      <a:solidFill>
-                        <a:srgbClr val="1F6FBF"/>
-                      </a:solidFill>
-                      <a:prstDash val="solid"/>
-                      <a:round/>
-                      <a:headEnd type="none" w="med" len="med"/>
-                      <a:tailEnd type="none" w="med" len="med"/>
-                    </a:lnT>
-                    <a:lnB w="6350" cap="flat" cmpd="sng" algn="ctr">
-                      <a:solidFill>
-                        <a:srgbClr val="1F6FBF"/>
-                      </a:solidFill>
-                      <a:prstDash val="solid"/>
-                      <a:round/>
-                      <a:headEnd type="none" w="med" len="med"/>
-                      <a:tailEnd type="none" w="med" len="med"/>
-                    </a:lnB>
-                    <a:solidFill>
-                      <a:srgbClr val="0D1F35"/>
-                    </a:solidFill>
-                  </a:tcPr>
-                </a:tc>
-                <a:tc>
-                  <a:txBody>
-                    <a:bodyPr/>
-                    <a:lstStyle/>
-                    <a:p>
-                      <a:pPr marL="0" indent="0" algn="ctr">
-                        <a:buNone/>
-                      </a:pPr>
-                      <a:r>
-                        <a:rPr lang="en-US" sz="1150" dirty="0">
-                          <a:solidFill>
-                            <a:srgbClr val="FFFFFF"/>
-                          </a:solidFill>
-                          <a:latin typeface="Calibri" panose="020F0502020204030204" pitchFamily="34" charset="0"/>
-                          <a:ea typeface="Calibri" panose="020F0502020204030204" pitchFamily="34" charset="-122"/>
-                          <a:cs typeface="Calibri" panose="020F0502020204030204" pitchFamily="34" charset="-120"/>
-                        </a:rPr>
-                        <a:t>20243120070</a:t>
-                      </a:r>
-                      <a:endParaRPr lang="en-US" sz="1150" dirty="0">
-                        <a:latin typeface="Calibri" panose="020F0502020204030204" pitchFamily="34" charset="0"/>
-                        <a:ea typeface="Calibri" panose="020F0502020204030204" pitchFamily="34" charset="0"/>
-                        <a:cs typeface="Calibri" panose="020F0502020204030204" pitchFamily="34" charset="0"/>
-                      </a:endParaRPr>
-                    </a:p>
-                  </a:txBody>
-                  <a:tcPr anchor="ctr">
-                    <a:lnL w="6350" cap="flat" cmpd="sng" algn="ctr">
-                      <a:solidFill>
-                        <a:srgbClr val="1F6FBF"/>
-                      </a:solidFill>
-                      <a:prstDash val="solid"/>
-                      <a:round/>
-                      <a:headEnd type="none" w="med" len="med"/>
-                      <a:tailEnd type="none" w="med" len="med"/>
-                    </a:lnL>
-                    <a:lnR w="6350" cap="flat" cmpd="sng" algn="ctr">
-                      <a:solidFill>
-                        <a:srgbClr val="1F6FBF"/>
-                      </a:solidFill>
-                      <a:prstDash val="solid"/>
-                      <a:round/>
-                      <a:headEnd type="none" w="med" len="med"/>
-                      <a:tailEnd type="none" w="med" len="med"/>
-                    </a:lnR>
-                    <a:lnT w="6350" cap="flat" cmpd="sng" algn="ctr">
-                      <a:solidFill>
-                        <a:srgbClr val="1F6FBF"/>
-                      </a:solidFill>
-                      <a:prstDash val="solid"/>
-                      <a:round/>
-                      <a:headEnd type="none" w="med" len="med"/>
-                      <a:tailEnd type="none" w="med" len="med"/>
-                    </a:lnT>
-                    <a:lnB w="6350" cap="flat" cmpd="sng" algn="ctr">
-                      <a:solidFill>
-                        <a:srgbClr val="1F6FBF"/>
-                      </a:solidFill>
-                      <a:prstDash val="solid"/>
-                      <a:round/>
-                      <a:headEnd type="none" w="med" len="med"/>
-                      <a:tailEnd type="none" w="med" len="med"/>
-                    </a:lnB>
-                    <a:solidFill>
-                      <a:srgbClr val="0D1F35"/>
-                    </a:solidFill>
-                  </a:tcPr>
-                </a:tc>
-                <a:tc>
-                  <a:txBody>
-                    <a:bodyPr/>
-                    <a:lstStyle/>
-                    <a:p>
-                      <a:pPr marL="0" indent="0" algn="ctr">
-                        <a:buNone/>
-                      </a:pPr>
-                      <a:r>
-                        <a:rPr lang="en-US" sz="1150" dirty="0">
-                          <a:solidFill>
-                            <a:srgbClr val="FFFFFF"/>
-                          </a:solidFill>
-                          <a:latin typeface="Calibri" panose="020F0502020204030204" pitchFamily="34" charset="0"/>
-                          <a:ea typeface="Calibri" panose="020F0502020204030204" pitchFamily="34" charset="-122"/>
-                          <a:cs typeface="Calibri" panose="020F0502020204030204" pitchFamily="34" charset="-120"/>
-                        </a:rPr>
-                        <a:t>50%</a:t>
-                      </a:r>
-                      <a:endParaRPr lang="en-US" sz="1150" dirty="0">
-                        <a:latin typeface="Calibri" panose="020F0502020204030204" pitchFamily="34" charset="0"/>
-                        <a:ea typeface="Calibri" panose="020F0502020204030204" pitchFamily="34" charset="0"/>
-                        <a:cs typeface="Calibri" panose="020F0502020204030204" pitchFamily="34" charset="0"/>
-                      </a:endParaRPr>
-                    </a:p>
-                  </a:txBody>
-                  <a:tcPr anchor="ctr">
-                    <a:lnL w="6350" cap="flat" cmpd="sng" algn="ctr">
-                      <a:solidFill>
-                        <a:srgbClr val="1F6FBF"/>
-                      </a:solidFill>
-                      <a:prstDash val="solid"/>
-                      <a:round/>
-                      <a:headEnd type="none" w="med" len="med"/>
-                      <a:tailEnd type="none" w="med" len="med"/>
-                    </a:lnL>
-                    <a:lnR w="6350" cap="flat" cmpd="sng" algn="ctr">
-                      <a:solidFill>
-                        <a:srgbClr val="1F6FBF"/>
-                      </a:solidFill>
-                      <a:prstDash val="solid"/>
-                      <a:round/>
-                      <a:headEnd type="none" w="med" len="med"/>
-                      <a:tailEnd type="none" w="med" len="med"/>
-                    </a:lnR>
-                    <a:lnT w="6350" cap="flat" cmpd="sng" algn="ctr">
-                      <a:solidFill>
-                        <a:srgbClr val="1F6FBF"/>
-                      </a:solidFill>
-                      <a:prstDash val="solid"/>
-                      <a:round/>
-                      <a:headEnd type="none" w="med" len="med"/>
-                      <a:tailEnd type="none" w="med" len="med"/>
-                    </a:lnT>
-                    <a:lnB w="6350" cap="flat" cmpd="sng" algn="ctr">
-                      <a:solidFill>
-                        <a:srgbClr val="1F6FBF"/>
-                      </a:solidFill>
-                      <a:prstDash val="solid"/>
-                      <a:round/>
-                      <a:headEnd type="none" w="med" len="med"/>
-                      <a:tailEnd type="none" w="med" len="med"/>
-                    </a:lnB>
-                    <a:solidFill>
-                      <a:srgbClr val="0D1F35"/>
-                    </a:solidFill>
-                  </a:tcPr>
-                </a:tc>
-                <a:tc>
-                  <a:txBody>
-                    <a:bodyPr/>
-                    <a:lstStyle/>
-                    <a:p>
-                      <a:pPr marL="0" indent="0" algn="ctr">
-                        <a:buNone/>
-                      </a:pPr>
-                      <a:r>
-                        <a:rPr lang="en-US" sz="1150" dirty="0">
-                          <a:solidFill>
-                            <a:srgbClr val="FFFFFF"/>
-                          </a:solidFill>
-                          <a:latin typeface="Calibri" panose="020F0502020204030204" pitchFamily="34" charset="0"/>
-                          <a:ea typeface="Calibri" panose="020F0502020204030204" pitchFamily="34" charset="-122"/>
-                          <a:cs typeface="Calibri" panose="020F0502020204030204" pitchFamily="34" charset="-120"/>
-                        </a:rPr>
-                        <a:t>CNN design, coding, training, hyperparameter tuning, result analysis</a:t>
-                      </a:r>
-                      <a:endParaRPr lang="en-US" sz="1150" dirty="0">
-                        <a:latin typeface="Calibri" panose="020F0502020204030204" pitchFamily="34" charset="0"/>
-                        <a:ea typeface="Calibri" panose="020F0502020204030204" pitchFamily="34" charset="0"/>
-                        <a:cs typeface="Calibri" panose="020F0502020204030204" pitchFamily="34" charset="0"/>
-                      </a:endParaRPr>
-                    </a:p>
-                  </a:txBody>
-                  <a:tcPr anchor="ctr">
-                    <a:lnL w="6350" cap="flat" cmpd="sng" algn="ctr">
-                      <a:solidFill>
-                        <a:srgbClr val="1F6FBF"/>
-                      </a:solidFill>
-                      <a:prstDash val="solid"/>
-                      <a:round/>
-                      <a:headEnd type="none" w="med" len="med"/>
-                      <a:tailEnd type="none" w="med" len="med"/>
-                    </a:lnL>
-                    <a:lnR w="6350" cap="flat" cmpd="sng" algn="ctr">
-                      <a:solidFill>
-                        <a:srgbClr val="1F6FBF"/>
-                      </a:solidFill>
-                      <a:prstDash val="solid"/>
-                      <a:round/>
-                      <a:headEnd type="none" w="med" len="med"/>
-                      <a:tailEnd type="none" w="med" len="med"/>
-                    </a:lnR>
-                    <a:lnT w="6350" cap="flat" cmpd="sng" algn="ctr">
-                      <a:solidFill>
-                        <a:srgbClr val="1F6FBF"/>
-                      </a:solidFill>
-                      <a:prstDash val="solid"/>
-                      <a:round/>
-                      <a:headEnd type="none" w="med" len="med"/>
-                      <a:tailEnd type="none" w="med" len="med"/>
-                    </a:lnT>
-                    <a:lnB w="6350" cap="flat" cmpd="sng" algn="ctr">
-                      <a:solidFill>
-                        <a:srgbClr val="1F6FBF"/>
-                      </a:solidFill>
-                      <a:prstDash val="solid"/>
-                      <a:round/>
-                      <a:headEnd type="none" w="med" len="med"/>
-                      <a:tailEnd type="none" w="med" len="med"/>
-                    </a:lnB>
-                    <a:solidFill>
-                      <a:srgbClr val="0D1F35"/>
-                    </a:solidFill>
-                  </a:tcPr>
-                </a:tc>
-              </a:tr>
-              <a:tr h="457200">
-                <a:tc>
-                  <a:txBody>
-                    <a:bodyPr/>
-                    <a:lstStyle/>
-                    <a:p>
-                      <a:pPr marL="0" indent="0" algn="ctr">
-                        <a:buNone/>
-                      </a:pPr>
-                      <a:r>
-                        <a:rPr lang="en-US" sz="1150" dirty="0">
-                          <a:solidFill>
-                            <a:srgbClr val="FFFFFF"/>
-                          </a:solidFill>
-                          <a:latin typeface="Calibri" panose="020F0502020204030204" pitchFamily="34" charset="0"/>
-                          <a:ea typeface="Calibri" panose="020F0502020204030204" pitchFamily="34" charset="-122"/>
-                          <a:cs typeface="Calibri" panose="020F0502020204030204" pitchFamily="34" charset="-120"/>
-                        </a:rPr>
-                        <a:t>ULLAH SAMI</a:t>
-                      </a:r>
-                      <a:endParaRPr lang="en-US" sz="1150" dirty="0">
-                        <a:latin typeface="Calibri" panose="020F0502020204030204" pitchFamily="34" charset="0"/>
-                        <a:ea typeface="Calibri" panose="020F0502020204030204" pitchFamily="34" charset="0"/>
-                        <a:cs typeface="Calibri" panose="020F0502020204030204" pitchFamily="34" charset="0"/>
-                      </a:endParaRPr>
-                    </a:p>
-                  </a:txBody>
-                  <a:tcPr anchor="ctr">
-                    <a:lnL w="6350" cap="flat" cmpd="sng" algn="ctr">
-                      <a:solidFill>
-                        <a:srgbClr val="1F6FBF"/>
-                      </a:solidFill>
-                      <a:prstDash val="solid"/>
-                      <a:round/>
-                      <a:headEnd type="none" w="med" len="med"/>
-                      <a:tailEnd type="none" w="med" len="med"/>
-                    </a:lnL>
-                    <a:lnR w="6350" cap="flat" cmpd="sng" algn="ctr">
-                      <a:solidFill>
-                        <a:srgbClr val="1F6FBF"/>
-                      </a:solidFill>
-                      <a:prstDash val="solid"/>
-                      <a:round/>
-                      <a:headEnd type="none" w="med" len="med"/>
-                      <a:tailEnd type="none" w="med" len="med"/>
-                    </a:lnR>
-                    <a:lnT w="6350" cap="flat" cmpd="sng" algn="ctr">
-                      <a:solidFill>
-                        <a:srgbClr val="1F6FBF"/>
-                      </a:solidFill>
-                      <a:prstDash val="solid"/>
-                      <a:round/>
-                      <a:headEnd type="none" w="med" len="med"/>
-                      <a:tailEnd type="none" w="med" len="med"/>
-                    </a:lnT>
-                    <a:lnB w="6350" cap="flat" cmpd="sng" algn="ctr">
-                      <a:solidFill>
-                        <a:srgbClr val="1F6FBF"/>
-                      </a:solidFill>
-                      <a:prstDash val="solid"/>
-                      <a:round/>
-                      <a:headEnd type="none" w="med" len="med"/>
-                      <a:tailEnd type="none" w="med" len="med"/>
-                    </a:lnB>
-                    <a:solidFill>
-                      <a:srgbClr val="0D1F35"/>
-                    </a:solidFill>
-                  </a:tcPr>
-                </a:tc>
-                <a:tc>
-                  <a:txBody>
-                    <a:bodyPr/>
-                    <a:lstStyle/>
-                    <a:p>
-                      <a:pPr marL="0" indent="0" algn="ctr">
-                        <a:buNone/>
-                      </a:pPr>
-                      <a:r>
-                        <a:rPr lang="en-US" sz="1150" dirty="0">
-                          <a:solidFill>
-                            <a:srgbClr val="FFFFFF"/>
-                          </a:solidFill>
-                          <a:latin typeface="Calibri" panose="020F0502020204030204" pitchFamily="34" charset="0"/>
-                          <a:ea typeface="Calibri" panose="020F0502020204030204" pitchFamily="34" charset="-122"/>
-                          <a:cs typeface="Calibri" panose="020F0502020204030204" pitchFamily="34" charset="-120"/>
-                        </a:rPr>
-                        <a:t>20243120005</a:t>
-                      </a:r>
-                      <a:endParaRPr lang="en-US" sz="1150" dirty="0">
-                        <a:latin typeface="Calibri" panose="020F0502020204030204" pitchFamily="34" charset="0"/>
-                        <a:ea typeface="Calibri" panose="020F0502020204030204" pitchFamily="34" charset="0"/>
-                        <a:cs typeface="Calibri" panose="020F0502020204030204" pitchFamily="34" charset="0"/>
-                      </a:endParaRPr>
-                    </a:p>
-                  </a:txBody>
-                  <a:tcPr anchor="ctr">
-                    <a:lnL w="6350" cap="flat" cmpd="sng" algn="ctr">
-                      <a:solidFill>
-                        <a:srgbClr val="1F6FBF"/>
-                      </a:solidFill>
-                      <a:prstDash val="solid"/>
-                      <a:round/>
-                      <a:headEnd type="none" w="med" len="med"/>
-                      <a:tailEnd type="none" w="med" len="med"/>
-                    </a:lnL>
-                    <a:lnR w="6350" cap="flat" cmpd="sng" algn="ctr">
-                      <a:solidFill>
-                        <a:srgbClr val="1F6FBF"/>
-                      </a:solidFill>
-                      <a:prstDash val="solid"/>
-                      <a:round/>
-                      <a:headEnd type="none" w="med" len="med"/>
-                      <a:tailEnd type="none" w="med" len="med"/>
-                    </a:lnR>
-                    <a:lnT w="6350" cap="flat" cmpd="sng" algn="ctr">
-                      <a:solidFill>
-                        <a:srgbClr val="1F6FBF"/>
-                      </a:solidFill>
-                      <a:prstDash val="solid"/>
-                      <a:round/>
-                      <a:headEnd type="none" w="med" len="med"/>
-                      <a:tailEnd type="none" w="med" len="med"/>
-                    </a:lnT>
-                    <a:lnB w="6350" cap="flat" cmpd="sng" algn="ctr">
-                      <a:solidFill>
-                        <a:srgbClr val="1F6FBF"/>
-                      </a:solidFill>
-                      <a:prstDash val="solid"/>
-                      <a:round/>
-                      <a:headEnd type="none" w="med" len="med"/>
-                      <a:tailEnd type="none" w="med" len="med"/>
-                    </a:lnB>
-                    <a:solidFill>
-                      <a:srgbClr val="0D1F35"/>
-                    </a:solidFill>
-                  </a:tcPr>
-                </a:tc>
-                <a:tc>
-                  <a:txBody>
-                    <a:bodyPr/>
-                    <a:lstStyle/>
-                    <a:p>
-                      <a:pPr marL="0" indent="0" algn="ctr">
-                        <a:buNone/>
-                      </a:pPr>
-                      <a:r>
-                        <a:rPr lang="en-US" sz="1150" dirty="0">
-                          <a:solidFill>
-                            <a:srgbClr val="FFFFFF"/>
-                          </a:solidFill>
-                          <a:latin typeface="Calibri" panose="020F0502020204030204" pitchFamily="34" charset="0"/>
-                          <a:ea typeface="Calibri" panose="020F0502020204030204" pitchFamily="34" charset="-122"/>
-                          <a:cs typeface="Calibri" panose="020F0502020204030204" pitchFamily="34" charset="-120"/>
-                        </a:rPr>
-                        <a:t>50%</a:t>
-                      </a:r>
-                      <a:endParaRPr lang="en-US" sz="1150" dirty="0">
-                        <a:latin typeface="Calibri" panose="020F0502020204030204" pitchFamily="34" charset="0"/>
-                        <a:ea typeface="Calibri" panose="020F0502020204030204" pitchFamily="34" charset="0"/>
-                        <a:cs typeface="Calibri" panose="020F0502020204030204" pitchFamily="34" charset="0"/>
-                      </a:endParaRPr>
-                    </a:p>
-                  </a:txBody>
-                  <a:tcPr anchor="ctr">
-                    <a:lnL w="6350" cap="flat" cmpd="sng" algn="ctr">
-                      <a:solidFill>
-                        <a:srgbClr val="1F6FBF"/>
-                      </a:solidFill>
-                      <a:prstDash val="solid"/>
-                      <a:round/>
-                      <a:headEnd type="none" w="med" len="med"/>
-                      <a:tailEnd type="none" w="med" len="med"/>
-                    </a:lnL>
-                    <a:lnR w="6350" cap="flat" cmpd="sng" algn="ctr">
-                      <a:solidFill>
-                        <a:srgbClr val="1F6FBF"/>
-                      </a:solidFill>
-                      <a:prstDash val="solid"/>
-                      <a:round/>
-                      <a:headEnd type="none" w="med" len="med"/>
-                      <a:tailEnd type="none" w="med" len="med"/>
-                    </a:lnR>
-                    <a:lnT w="6350" cap="flat" cmpd="sng" algn="ctr">
-                      <a:solidFill>
-                        <a:srgbClr val="1F6FBF"/>
-                      </a:solidFill>
-                      <a:prstDash val="solid"/>
-                      <a:round/>
-                      <a:headEnd type="none" w="med" len="med"/>
-                      <a:tailEnd type="none" w="med" len="med"/>
-                    </a:lnT>
-                    <a:lnB w="6350" cap="flat" cmpd="sng" algn="ctr">
-                      <a:solidFill>
-                        <a:srgbClr val="1F6FBF"/>
-                      </a:solidFill>
-                      <a:prstDash val="solid"/>
-                      <a:round/>
-                      <a:headEnd type="none" w="med" len="med"/>
-                      <a:tailEnd type="none" w="med" len="med"/>
-                    </a:lnB>
-                    <a:solidFill>
-                      <a:srgbClr val="0D1F35"/>
-                    </a:solidFill>
-                  </a:tcPr>
-                </a:tc>
-                <a:tc>
-                  <a:txBody>
-                    <a:bodyPr/>
-                    <a:lstStyle/>
-                    <a:p>
-                      <a:pPr marL="0" indent="0" algn="ctr">
-                        <a:buNone/>
-                      </a:pPr>
-                      <a:r>
-                        <a:rPr lang="en-US" sz="1150" dirty="0">
-                          <a:solidFill>
-                            <a:srgbClr val="FFFFFF"/>
-                          </a:solidFill>
-                          <a:latin typeface="Calibri" panose="020F0502020204030204" pitchFamily="34" charset="0"/>
-                          <a:ea typeface="Calibri" panose="020F0502020204030204" pitchFamily="34" charset="-122"/>
-                          <a:cs typeface="Calibri" panose="020F0502020204030204" pitchFamily="34" charset="-120"/>
-                        </a:rPr>
-                        <a:t>Data preprocessing, literature review, PowerPoint, result visualisation</a:t>
-                      </a:r>
-                      <a:endParaRPr lang="en-US" sz="1150" dirty="0">
-                        <a:latin typeface="Calibri" panose="020F0502020204030204" pitchFamily="34" charset="0"/>
-                        <a:ea typeface="Calibri" panose="020F0502020204030204" pitchFamily="34" charset="0"/>
-                        <a:cs typeface="Calibri" panose="020F0502020204030204" pitchFamily="34" charset="0"/>
-                      </a:endParaRPr>
-                    </a:p>
-                  </a:txBody>
-                  <a:tcPr anchor="ctr">
-                    <a:lnL w="6350" cap="flat" cmpd="sng" algn="ctr">
-                      <a:solidFill>
-                        <a:srgbClr val="1F6FBF"/>
-                      </a:solidFill>
-                      <a:prstDash val="solid"/>
-                      <a:round/>
-                      <a:headEnd type="none" w="med" len="med"/>
-                      <a:tailEnd type="none" w="med" len="med"/>
-                    </a:lnL>
-                    <a:lnR w="6350" cap="flat" cmpd="sng" algn="ctr">
-                      <a:solidFill>
-                        <a:srgbClr val="1F6FBF"/>
-                      </a:solidFill>
-                      <a:prstDash val="solid"/>
-                      <a:round/>
-                      <a:headEnd type="none" w="med" len="med"/>
-                      <a:tailEnd type="none" w="med" len="med"/>
-                    </a:lnR>
-                    <a:lnT w="6350" cap="flat" cmpd="sng" algn="ctr">
-                      <a:solidFill>
-                        <a:srgbClr val="1F6FBF"/>
-                      </a:solidFill>
-                      <a:prstDash val="solid"/>
-                      <a:round/>
-                      <a:headEnd type="none" w="med" len="med"/>
-                      <a:tailEnd type="none" w="med" len="med"/>
-                    </a:lnT>
-                    <a:lnB w="6350" cap="flat" cmpd="sng" algn="ctr">
-                      <a:solidFill>
-                        <a:srgbClr val="1F6FBF"/>
-                      </a:solidFill>
-                      <a:prstDash val="solid"/>
-                      <a:round/>
-                      <a:headEnd type="none" w="med" len="med"/>
-                      <a:tailEnd type="none" w="med" len="med"/>
-                    </a:lnB>
-                    <a:solidFill>
-                      <a:srgbClr val="0D1F35"/>
-                    </a:solidFill>
-                  </a:tcPr>
-                </a:tc>
-              </a:tr>
-            </a:tbl>
-          </a:graphicData>
-        </a:graphic>
-      </p:graphicFrame>
       <p:sp>
         <p:nvSpPr>
           <p:cNvPr id="18" name="Shape 15"/>
@@ -9271,6 +9000,13 @@
             <a:srgbClr val="1F6FBF"/>
           </a:solidFill>
         </p:spPr>
+        <p:txBody>
+          <a:bodyPr/>
+          <a:lstStyle/>
+          <a:p>
+            <a:endParaRPr lang="en-US"/>
+          </a:p>
+        </p:txBody>
       </p:sp>
       <p:sp>
         <p:nvSpPr>
@@ -9350,6 +9086,13 @@
             <a:srgbClr val="1A3A5C"/>
           </a:solidFill>
         </p:spPr>
+        <p:txBody>
+          <a:bodyPr/>
+          <a:lstStyle/>
+          <a:p>
+            <a:endParaRPr lang="en-US"/>
+          </a:p>
+        </p:txBody>
       </p:sp>
       <p:sp>
         <p:nvSpPr>
@@ -9407,6 +9150,13 @@
             <a:srgbClr val="B8D4F0"/>
           </a:solidFill>
         </p:spPr>
+        <p:txBody>
+          <a:bodyPr/>
+          <a:lstStyle/>
+          <a:p>
+            <a:endParaRPr lang="en-US"/>
+          </a:p>
+        </p:txBody>
       </p:sp>
       <p:sp>
         <p:nvSpPr>
@@ -9433,6 +9183,13 @@
             </a:outerShdw>
           </a:effectLst>
         </p:spPr>
+        <p:txBody>
+          <a:bodyPr/>
+          <a:lstStyle/>
+          <a:p>
+            <a:endParaRPr lang="en-US"/>
+          </a:p>
+        </p:txBody>
       </p:sp>
       <p:sp>
         <p:nvSpPr>
@@ -9452,6 +9209,13 @@
             <a:srgbClr val="1F6FBF"/>
           </a:solidFill>
         </p:spPr>
+        <p:txBody>
+          <a:bodyPr/>
+          <a:lstStyle/>
+          <a:p>
+            <a:endParaRPr lang="en-US"/>
+          </a:p>
+        </p:txBody>
       </p:sp>
       <p:sp>
         <p:nvSpPr>
@@ -9554,6 +9318,13 @@
             </a:outerShdw>
           </a:effectLst>
         </p:spPr>
+        <p:txBody>
+          <a:bodyPr/>
+          <a:lstStyle/>
+          <a:p>
+            <a:endParaRPr lang="en-US"/>
+          </a:p>
+        </p:txBody>
       </p:sp>
       <p:sp>
         <p:nvSpPr>
@@ -9573,6 +9344,13 @@
             <a:srgbClr val="1F6FBF"/>
           </a:solidFill>
         </p:spPr>
+        <p:txBody>
+          <a:bodyPr/>
+          <a:lstStyle/>
+          <a:p>
+            <a:endParaRPr lang="en-US"/>
+          </a:p>
+        </p:txBody>
       </p:sp>
       <p:sp>
         <p:nvSpPr>
@@ -9675,6 +9453,13 @@
             </a:outerShdw>
           </a:effectLst>
         </p:spPr>
+        <p:txBody>
+          <a:bodyPr/>
+          <a:lstStyle/>
+          <a:p>
+            <a:endParaRPr lang="en-US"/>
+          </a:p>
+        </p:txBody>
       </p:sp>
       <p:sp>
         <p:nvSpPr>
@@ -9694,6 +9479,13 @@
             <a:srgbClr val="1F6FBF"/>
           </a:solidFill>
         </p:spPr>
+        <p:txBody>
+          <a:bodyPr/>
+          <a:lstStyle/>
+          <a:p>
+            <a:endParaRPr lang="en-US"/>
+          </a:p>
+        </p:txBody>
       </p:sp>
       <p:sp>
         <p:nvSpPr>
@@ -9796,6 +9588,13 @@
             </a:outerShdw>
           </a:effectLst>
         </p:spPr>
+        <p:txBody>
+          <a:bodyPr/>
+          <a:lstStyle/>
+          <a:p>
+            <a:endParaRPr lang="en-US"/>
+          </a:p>
+        </p:txBody>
       </p:sp>
       <p:sp>
         <p:nvSpPr>
@@ -9815,6 +9614,13 @@
             <a:srgbClr val="1F6FBF"/>
           </a:solidFill>
         </p:spPr>
+        <p:txBody>
+          <a:bodyPr/>
+          <a:lstStyle/>
+          <a:p>
+            <a:endParaRPr lang="en-US"/>
+          </a:p>
+        </p:txBody>
       </p:sp>
       <p:sp>
         <p:nvSpPr>
@@ -9917,6 +9723,13 @@
             </a:outerShdw>
           </a:effectLst>
         </p:spPr>
+        <p:txBody>
+          <a:bodyPr/>
+          <a:lstStyle/>
+          <a:p>
+            <a:endParaRPr lang="en-US"/>
+          </a:p>
+        </p:txBody>
       </p:sp>
       <p:sp>
         <p:nvSpPr>
@@ -9936,6 +9749,13 @@
             <a:srgbClr val="1F6FBF"/>
           </a:solidFill>
         </p:spPr>
+        <p:txBody>
+          <a:bodyPr/>
+          <a:lstStyle/>
+          <a:p>
+            <a:endParaRPr lang="en-US"/>
+          </a:p>
+        </p:txBody>
       </p:sp>
       <p:sp>
         <p:nvSpPr>
@@ -10038,6 +9858,13 @@
             </a:outerShdw>
           </a:effectLst>
         </p:spPr>
+        <p:txBody>
+          <a:bodyPr/>
+          <a:lstStyle/>
+          <a:p>
+            <a:endParaRPr lang="en-US"/>
+          </a:p>
+        </p:txBody>
       </p:sp>
       <p:sp>
         <p:nvSpPr>
@@ -10057,6 +9884,13 @@
             <a:srgbClr val="1F6FBF"/>
           </a:solidFill>
         </p:spPr>
+        <p:txBody>
+          <a:bodyPr/>
+          <a:lstStyle/>
+          <a:p>
+            <a:endParaRPr lang="en-US"/>
+          </a:p>
+        </p:txBody>
       </p:sp>
       <p:sp>
         <p:nvSpPr>
@@ -10159,6 +9993,13 @@
             </a:outerShdw>
           </a:effectLst>
         </p:spPr>
+        <p:txBody>
+          <a:bodyPr/>
+          <a:lstStyle/>
+          <a:p>
+            <a:endParaRPr lang="en-US"/>
+          </a:p>
+        </p:txBody>
       </p:sp>
       <p:sp>
         <p:nvSpPr>
@@ -10178,6 +10019,13 @@
             <a:srgbClr val="1F6FBF"/>
           </a:solidFill>
         </p:spPr>
+        <p:txBody>
+          <a:bodyPr/>
+          <a:lstStyle/>
+          <a:p>
+            <a:endParaRPr lang="en-US"/>
+          </a:p>
+        </p:txBody>
       </p:sp>
       <p:sp>
         <p:nvSpPr>
@@ -10280,6 +10128,13 @@
             </a:outerShdw>
           </a:effectLst>
         </p:spPr>
+        <p:txBody>
+          <a:bodyPr/>
+          <a:lstStyle/>
+          <a:p>
+            <a:endParaRPr lang="en-US"/>
+          </a:p>
+        </p:txBody>
       </p:sp>
       <p:sp>
         <p:nvSpPr>
@@ -10299,6 +10154,13 @@
             <a:srgbClr val="1F6FBF"/>
           </a:solidFill>
         </p:spPr>
+        <p:txBody>
+          <a:bodyPr/>
+          <a:lstStyle/>
+          <a:p>
+            <a:endParaRPr lang="en-US"/>
+          </a:p>
+        </p:txBody>
       </p:sp>
       <p:sp>
         <p:nvSpPr>
@@ -10401,6 +10263,13 @@
             </a:outerShdw>
           </a:effectLst>
         </p:spPr>
+        <p:txBody>
+          <a:bodyPr/>
+          <a:lstStyle/>
+          <a:p>
+            <a:endParaRPr lang="en-US"/>
+          </a:p>
+        </p:txBody>
       </p:sp>
       <p:sp>
         <p:nvSpPr>
@@ -10420,6 +10289,13 @@
             <a:srgbClr val="1F6FBF"/>
           </a:solidFill>
         </p:spPr>
+        <p:txBody>
+          <a:bodyPr/>
+          <a:lstStyle/>
+          <a:p>
+            <a:endParaRPr lang="en-US"/>
+          </a:p>
+        </p:txBody>
       </p:sp>
       <p:sp>
         <p:nvSpPr>
@@ -10522,6 +10398,13 @@
             </a:outerShdw>
           </a:effectLst>
         </p:spPr>
+        <p:txBody>
+          <a:bodyPr/>
+          <a:lstStyle/>
+          <a:p>
+            <a:endParaRPr lang="en-US"/>
+          </a:p>
+        </p:txBody>
       </p:sp>
       <p:sp>
         <p:nvSpPr>
@@ -10541,6 +10424,13 @@
             <a:srgbClr val="1F6FBF"/>
           </a:solidFill>
         </p:spPr>
+        <p:txBody>
+          <a:bodyPr/>
+          <a:lstStyle/>
+          <a:p>
+            <a:endParaRPr lang="en-US"/>
+          </a:p>
+        </p:txBody>
       </p:sp>
       <p:sp>
         <p:nvSpPr>
@@ -10669,6 +10559,13 @@
             <a:srgbClr val="1A3A5C"/>
           </a:solidFill>
         </p:spPr>
+        <p:txBody>
+          <a:bodyPr/>
+          <a:lstStyle/>
+          <a:p>
+            <a:endParaRPr lang="en-US"/>
+          </a:p>
+        </p:txBody>
       </p:sp>
       <p:sp>
         <p:nvSpPr>
@@ -10726,6 +10623,13 @@
             <a:srgbClr val="B8D4F0"/>
           </a:solidFill>
         </p:spPr>
+        <p:txBody>
+          <a:bodyPr/>
+          <a:lstStyle/>
+          <a:p>
+            <a:endParaRPr lang="en-US"/>
+          </a:p>
+        </p:txBody>
       </p:sp>
       <p:sp>
         <p:nvSpPr>
@@ -10752,6 +10656,13 @@
             </a:outerShdw>
           </a:effectLst>
         </p:spPr>
+        <p:txBody>
+          <a:bodyPr/>
+          <a:lstStyle/>
+          <a:p>
+            <a:endParaRPr lang="en-US"/>
+          </a:p>
+        </p:txBody>
       </p:sp>
       <p:sp>
         <p:nvSpPr>
@@ -10773,6 +10684,13 @@
             </a:schemeClr>
           </a:solidFill>
         </p:spPr>
+        <p:txBody>
+          <a:bodyPr/>
+          <a:lstStyle/>
+          <a:p>
+            <a:endParaRPr lang="en-US"/>
+          </a:p>
+        </p:txBody>
       </p:sp>
       <p:sp>
         <p:nvSpPr>
@@ -10952,6 +10870,7 @@
         </p:spPr>
         <p:txBody>
           <a:bodyPr/>
+          <a:lstStyle/>
           <a:p>
             <a:endParaRPr lang="en-US"/>
           </a:p>
@@ -11131,6 +11050,13 @@
             </a:outerShdw>
           </a:effectLst>
         </p:spPr>
+        <p:txBody>
+          <a:bodyPr/>
+          <a:lstStyle/>
+          <a:p>
+            <a:endParaRPr lang="en-US"/>
+          </a:p>
+        </p:txBody>
       </p:sp>
       <p:sp>
         <p:nvSpPr>
@@ -11150,6 +11076,13 @@
             <a:srgbClr val="1F6FBF"/>
           </a:solidFill>
         </p:spPr>
+        <p:txBody>
+          <a:bodyPr/>
+          <a:lstStyle/>
+          <a:p>
+            <a:endParaRPr lang="en-US"/>
+          </a:p>
+        </p:txBody>
       </p:sp>
       <p:sp>
         <p:nvSpPr>
@@ -11278,6 +11211,13 @@
             <a:srgbClr val="1A3A5C"/>
           </a:solidFill>
         </p:spPr>
+        <p:txBody>
+          <a:bodyPr/>
+          <a:lstStyle/>
+          <a:p>
+            <a:endParaRPr lang="en-US"/>
+          </a:p>
+        </p:txBody>
       </p:sp>
       <p:sp>
         <p:nvSpPr>
@@ -11335,6 +11275,13 @@
             <a:srgbClr val="B8D4F0"/>
           </a:solidFill>
         </p:spPr>
+        <p:txBody>
+          <a:bodyPr/>
+          <a:lstStyle/>
+          <a:p>
+            <a:endParaRPr lang="en-US"/>
+          </a:p>
+        </p:txBody>
       </p:sp>
       <p:sp>
         <p:nvSpPr>
@@ -11356,6 +11303,13 @@
             <a:srgbClr val="E8F2FC"/>
           </a:solidFill>
         </p:spPr>
+        <p:txBody>
+          <a:bodyPr/>
+          <a:lstStyle/>
+          <a:p>
+            <a:endParaRPr lang="en-US"/>
+          </a:p>
+        </p:txBody>
       </p:sp>
       <p:sp>
         <p:nvSpPr>
@@ -11453,6 +11407,13 @@
             <a:srgbClr val="E8F2FC"/>
           </a:solidFill>
         </p:spPr>
+        <p:txBody>
+          <a:bodyPr/>
+          <a:lstStyle/>
+          <a:p>
+            <a:endParaRPr lang="en-US"/>
+          </a:p>
+        </p:txBody>
       </p:sp>
       <p:sp>
         <p:nvSpPr>
@@ -11550,6 +11511,13 @@
             <a:srgbClr val="E8F2FC"/>
           </a:solidFill>
         </p:spPr>
+        <p:txBody>
+          <a:bodyPr/>
+          <a:lstStyle/>
+          <a:p>
+            <a:endParaRPr lang="en-US"/>
+          </a:p>
+        </p:txBody>
       </p:sp>
       <p:sp>
         <p:nvSpPr>
@@ -11647,6 +11615,13 @@
             <a:srgbClr val="E8F2FC"/>
           </a:solidFill>
         </p:spPr>
+        <p:txBody>
+          <a:bodyPr/>
+          <a:lstStyle/>
+          <a:p>
+            <a:endParaRPr lang="en-US"/>
+          </a:p>
+        </p:txBody>
       </p:sp>
       <p:sp>
         <p:nvSpPr>
@@ -11749,6 +11724,13 @@
             </a:outerShdw>
           </a:effectLst>
         </p:spPr>
+        <p:txBody>
+          <a:bodyPr/>
+          <a:lstStyle/>
+          <a:p>
+            <a:endParaRPr lang="en-US"/>
+          </a:p>
+        </p:txBody>
       </p:sp>
       <p:sp>
         <p:nvSpPr>
@@ -11772,6 +11754,7 @@
         </p:spPr>
         <p:txBody>
           <a:bodyPr/>
+          <a:lstStyle/>
           <a:p>
             <a:endParaRPr lang="en-US"/>
           </a:p>
@@ -11825,15 +11808,27 @@
         </p:nvGraphicFramePr>
         <p:xfrm>
           <a:off x="228600" y="2450592"/>
-          <a:ext cx="8686800" cy="2414016"/>
+          <a:ext cx="8686800" cy="2468880"/>
         </p:xfrm>
         <a:graphic>
           <a:graphicData uri="http://schemas.openxmlformats.org/drawingml/2006/table">
             <a:tbl>
               <a:tblPr/>
               <a:tblGrid>
-                <a:gridCol w="2011680"/>
-                <a:gridCol w="6675120"/>
+                <a:gridCol w="2011680">
+                  <a:extLst>
+                    <a:ext uri="{9D8B030D-6E8A-4147-A177-3AD203B41FA5}">
+                      <a16:colId xmlns:a16="http://schemas.microsoft.com/office/drawing/2014/main" val="20000"/>
+                    </a:ext>
+                  </a:extLst>
+                </a:gridCol>
+                <a:gridCol w="6675120">
+                  <a:extLst>
+                    <a:ext uri="{9D8B030D-6E8A-4147-A177-3AD203B41FA5}">
+                      <a16:colId xmlns:a16="http://schemas.microsoft.com/office/drawing/2014/main" val="20001"/>
+                    </a:ext>
+                  </a:extLst>
+                </a:gridCol>
               </a:tblGrid>
               <a:tr h="402336">
                 <a:tc>
@@ -11972,6 +11967,11 @@
                     </a:solidFill>
                   </a:tcPr>
                 </a:tc>
+                <a:extLst>
+                  <a:ext uri="{0D108BD9-81ED-4DB2-BD59-A6C34878D82A}">
+                    <a16:rowId xmlns:a16="http://schemas.microsoft.com/office/drawing/2014/main" val="10000"/>
+                  </a:ext>
+                </a:extLst>
               </a:tr>
               <a:tr h="402336">
                 <a:tc>
@@ -12110,6 +12110,11 @@
                     </a:solidFill>
                   </a:tcPr>
                 </a:tc>
+                <a:extLst>
+                  <a:ext uri="{0D108BD9-81ED-4DB2-BD59-A6C34878D82A}">
+                    <a16:rowId xmlns:a16="http://schemas.microsoft.com/office/drawing/2014/main" val="10001"/>
+                  </a:ext>
+                </a:extLst>
               </a:tr>
               <a:tr h="402336">
                 <a:tc>
@@ -12248,6 +12253,11 @@
                     </a:solidFill>
                   </a:tcPr>
                 </a:tc>
+                <a:extLst>
+                  <a:ext uri="{0D108BD9-81ED-4DB2-BD59-A6C34878D82A}">
+                    <a16:rowId xmlns:a16="http://schemas.microsoft.com/office/drawing/2014/main" val="10002"/>
+                  </a:ext>
+                </a:extLst>
               </a:tr>
               <a:tr h="402336">
                 <a:tc>
@@ -12386,6 +12396,11 @@
                     </a:solidFill>
                   </a:tcPr>
                 </a:tc>
+                <a:extLst>
+                  <a:ext uri="{0D108BD9-81ED-4DB2-BD59-A6C34878D82A}">
+                    <a16:rowId xmlns:a16="http://schemas.microsoft.com/office/drawing/2014/main" val="10003"/>
+                  </a:ext>
+                </a:extLst>
               </a:tr>
               <a:tr h="402336">
                 <a:tc>
@@ -12524,6 +12539,11 @@
                     </a:solidFill>
                   </a:tcPr>
                 </a:tc>
+                <a:extLst>
+                  <a:ext uri="{0D108BD9-81ED-4DB2-BD59-A6C34878D82A}">
+                    <a16:rowId xmlns:a16="http://schemas.microsoft.com/office/drawing/2014/main" val="10004"/>
+                  </a:ext>
+                </a:extLst>
               </a:tr>
               <a:tr h="402336">
                 <a:tc>
@@ -12662,6 +12682,11 @@
                     </a:solidFill>
                   </a:tcPr>
                 </a:tc>
+                <a:extLst>
+                  <a:ext uri="{0D108BD9-81ED-4DB2-BD59-A6C34878D82A}">
+                    <a16:rowId xmlns:a16="http://schemas.microsoft.com/office/drawing/2014/main" val="10005"/>
+                  </a:ext>
+                </a:extLst>
               </a:tr>
             </a:tbl>
           </a:graphicData>
@@ -12718,6 +12743,13 @@
             <a:srgbClr val="1A3A5C"/>
           </a:solidFill>
         </p:spPr>
+        <p:txBody>
+          <a:bodyPr/>
+          <a:lstStyle/>
+          <a:p>
+            <a:endParaRPr lang="en-US"/>
+          </a:p>
+        </p:txBody>
       </p:sp>
       <p:sp>
         <p:nvSpPr>
@@ -12775,6 +12807,13 @@
             <a:srgbClr val="B8D4F0"/>
           </a:solidFill>
         </p:spPr>
+        <p:txBody>
+          <a:bodyPr/>
+          <a:lstStyle/>
+          <a:p>
+            <a:endParaRPr lang="en-US"/>
+          </a:p>
+        </p:txBody>
       </p:sp>
       <p:sp>
         <p:nvSpPr>
@@ -12801,6 +12840,13 @@
             </a:outerShdw>
           </a:effectLst>
         </p:spPr>
+        <p:txBody>
+          <a:bodyPr/>
+          <a:lstStyle/>
+          <a:p>
+            <a:endParaRPr lang="en-US"/>
+          </a:p>
+        </p:txBody>
       </p:sp>
       <p:sp>
         <p:nvSpPr>
@@ -12824,6 +12870,7 @@
         </p:spPr>
         <p:txBody>
           <a:bodyPr/>
+          <a:lstStyle/>
           <a:p>
             <a:endParaRPr lang="en-US"/>
           </a:p>
@@ -13003,6 +13050,13 @@
             </a:outerShdw>
           </a:effectLst>
         </p:spPr>
+        <p:txBody>
+          <a:bodyPr/>
+          <a:lstStyle/>
+          <a:p>
+            <a:endParaRPr lang="en-US"/>
+          </a:p>
+        </p:txBody>
       </p:sp>
       <p:sp>
         <p:nvSpPr>
@@ -13022,6 +13076,13 @@
             <a:srgbClr val="4A90D9"/>
           </a:solidFill>
         </p:spPr>
+        <p:txBody>
+          <a:bodyPr/>
+          <a:lstStyle/>
+          <a:p>
+            <a:endParaRPr lang="en-US"/>
+          </a:p>
+        </p:txBody>
       </p:sp>
       <p:sp>
         <p:nvSpPr>
@@ -13197,6 +13258,13 @@
             </a:outerShdw>
           </a:effectLst>
         </p:spPr>
+        <p:txBody>
+          <a:bodyPr/>
+          <a:lstStyle/>
+          <a:p>
+            <a:endParaRPr lang="en-US"/>
+          </a:p>
+        </p:txBody>
       </p:sp>
       <p:sp>
         <p:nvSpPr>
@@ -13216,6 +13284,13 @@
             <a:srgbClr val="1A3A5C"/>
           </a:solidFill>
         </p:spPr>
+        <p:txBody>
+          <a:bodyPr/>
+          <a:lstStyle/>
+          <a:p>
+            <a:endParaRPr lang="en-US"/>
+          </a:p>
+        </p:txBody>
       </p:sp>
       <p:sp>
         <p:nvSpPr>
@@ -13384,6 +13459,13 @@
             <a:srgbClr val="1F6FBF"/>
           </a:solidFill>
         </p:spPr>
+        <p:txBody>
+          <a:bodyPr/>
+          <a:lstStyle/>
+          <a:p>
+            <a:endParaRPr lang="en-US"/>
+          </a:p>
+        </p:txBody>
       </p:sp>
       <p:sp>
         <p:nvSpPr>
@@ -13474,6 +13556,13 @@
             <a:srgbClr val="1A3A5C"/>
           </a:solidFill>
         </p:spPr>
+        <p:txBody>
+          <a:bodyPr/>
+          <a:lstStyle/>
+          <a:p>
+            <a:endParaRPr lang="en-US"/>
+          </a:p>
+        </p:txBody>
       </p:sp>
       <p:sp>
         <p:nvSpPr>
@@ -13531,6 +13620,13 @@
             <a:srgbClr val="B8D4F0"/>
           </a:solidFill>
         </p:spPr>
+        <p:txBody>
+          <a:bodyPr/>
+          <a:lstStyle/>
+          <a:p>
+            <a:endParaRPr lang="en-US"/>
+          </a:p>
+        </p:txBody>
       </p:sp>
       <p:sp>
         <p:nvSpPr>
@@ -13552,6 +13648,13 @@
             <a:srgbClr val="4A90D9"/>
           </a:solidFill>
         </p:spPr>
+        <p:txBody>
+          <a:bodyPr/>
+          <a:lstStyle/>
+          <a:p>
+            <a:endParaRPr lang="en-US"/>
+          </a:p>
+        </p:txBody>
       </p:sp>
       <p:sp>
         <p:nvSpPr>
@@ -13626,6 +13729,13 @@
             <a:srgbClr val="6B7F94"/>
           </a:solidFill>
         </p:spPr>
+        <p:txBody>
+          <a:bodyPr/>
+          <a:lstStyle/>
+          <a:p>
+            <a:endParaRPr lang="en-US"/>
+          </a:p>
+        </p:txBody>
       </p:sp>
       <p:sp>
         <p:nvSpPr>
@@ -13647,6 +13757,13 @@
             <a:srgbClr val="1F6FBF"/>
           </a:solidFill>
         </p:spPr>
+        <p:txBody>
+          <a:bodyPr/>
+          <a:lstStyle/>
+          <a:p>
+            <a:endParaRPr lang="en-US"/>
+          </a:p>
+        </p:txBody>
       </p:sp>
       <p:sp>
         <p:nvSpPr>
@@ -13772,6 +13889,13 @@
             <a:srgbClr val="6B7F94"/>
           </a:solidFill>
         </p:spPr>
+        <p:txBody>
+          <a:bodyPr/>
+          <a:lstStyle/>
+          <a:p>
+            <a:endParaRPr lang="en-US"/>
+          </a:p>
+        </p:txBody>
       </p:sp>
       <p:sp>
         <p:nvSpPr>
@@ -13793,6 +13917,13 @@
             <a:srgbClr val="1F6FBF"/>
           </a:solidFill>
         </p:spPr>
+        <p:txBody>
+          <a:bodyPr/>
+          <a:lstStyle/>
+          <a:p>
+            <a:endParaRPr lang="en-US"/>
+          </a:p>
+        </p:txBody>
       </p:sp>
       <p:sp>
         <p:nvSpPr>
@@ -13918,6 +14049,13 @@
             <a:srgbClr val="6B7F94"/>
           </a:solidFill>
         </p:spPr>
+        <p:txBody>
+          <a:bodyPr/>
+          <a:lstStyle/>
+          <a:p>
+            <a:endParaRPr lang="en-US"/>
+          </a:p>
+        </p:txBody>
       </p:sp>
       <p:sp>
         <p:nvSpPr>
@@ -13939,6 +14077,13 @@
             <a:srgbClr val="1F6FBF"/>
           </a:solidFill>
         </p:spPr>
+        <p:txBody>
+          <a:bodyPr/>
+          <a:lstStyle/>
+          <a:p>
+            <a:endParaRPr lang="en-US"/>
+          </a:p>
+        </p:txBody>
       </p:sp>
       <p:sp>
         <p:nvSpPr>
@@ -14064,6 +14209,13 @@
             <a:srgbClr val="6B7F94"/>
           </a:solidFill>
         </p:spPr>
+        <p:txBody>
+          <a:bodyPr/>
+          <a:lstStyle/>
+          <a:p>
+            <a:endParaRPr lang="en-US"/>
+          </a:p>
+        </p:txBody>
       </p:sp>
       <p:sp>
         <p:nvSpPr>
@@ -14087,6 +14239,13 @@
             </a:schemeClr>
           </a:solidFill>
         </p:spPr>
+        <p:txBody>
+          <a:bodyPr/>
+          <a:lstStyle/>
+          <a:p>
+            <a:endParaRPr lang="en-US"/>
+          </a:p>
+        </p:txBody>
       </p:sp>
       <p:sp>
         <p:nvSpPr>
@@ -14161,6 +14320,13 @@
             <a:srgbClr val="6B7F94"/>
           </a:solidFill>
         </p:spPr>
+        <p:txBody>
+          <a:bodyPr/>
+          <a:lstStyle/>
+          <a:p>
+            <a:endParaRPr lang="en-US"/>
+          </a:p>
+        </p:txBody>
       </p:sp>
       <p:sp>
         <p:nvSpPr>
@@ -14184,6 +14350,13 @@
             </a:schemeClr>
           </a:solidFill>
         </p:spPr>
+        <p:txBody>
+          <a:bodyPr/>
+          <a:lstStyle/>
+          <a:p>
+            <a:endParaRPr lang="en-US"/>
+          </a:p>
+        </p:txBody>
       </p:sp>
       <p:sp>
         <p:nvSpPr>
@@ -14275,6 +14448,13 @@
             <a:srgbClr val="6B7F94"/>
           </a:solidFill>
         </p:spPr>
+        <p:txBody>
+          <a:bodyPr/>
+          <a:lstStyle/>
+          <a:p>
+            <a:endParaRPr lang="en-US"/>
+          </a:p>
+        </p:txBody>
       </p:sp>
       <p:sp>
         <p:nvSpPr>
@@ -14298,6 +14478,13 @@
             </a:schemeClr>
           </a:solidFill>
         </p:spPr>
+        <p:txBody>
+          <a:bodyPr/>
+          <a:lstStyle/>
+          <a:p>
+            <a:endParaRPr lang="en-US"/>
+          </a:p>
+        </p:txBody>
       </p:sp>
       <p:sp>
         <p:nvSpPr>
@@ -14379,6 +14566,13 @@
             </a:outerShdw>
           </a:effectLst>
         </p:spPr>
+        <p:txBody>
+          <a:bodyPr/>
+          <a:lstStyle/>
+          <a:p>
+            <a:endParaRPr lang="en-US"/>
+          </a:p>
+        </p:txBody>
       </p:sp>
       <p:sp>
         <p:nvSpPr>
@@ -14398,6 +14592,13 @@
             <a:srgbClr val="1F6FBF"/>
           </a:solidFill>
         </p:spPr>
+        <p:txBody>
+          <a:bodyPr/>
+          <a:lstStyle/>
+          <a:p>
+            <a:endParaRPr lang="en-US"/>
+          </a:p>
+        </p:txBody>
       </p:sp>
       <p:sp>
         <p:nvSpPr>
@@ -14500,6 +14701,13 @@
             </a:outerShdw>
           </a:effectLst>
         </p:spPr>
+        <p:txBody>
+          <a:bodyPr/>
+          <a:lstStyle/>
+          <a:p>
+            <a:endParaRPr lang="en-US"/>
+          </a:p>
+        </p:txBody>
       </p:sp>
       <p:sp>
         <p:nvSpPr>
@@ -14519,6 +14727,13 @@
             <a:srgbClr val="1F6FBF"/>
           </a:solidFill>
         </p:spPr>
+        <p:txBody>
+          <a:bodyPr/>
+          <a:lstStyle/>
+          <a:p>
+            <a:endParaRPr lang="en-US"/>
+          </a:p>
+        </p:txBody>
       </p:sp>
       <p:sp>
         <p:nvSpPr>
@@ -14621,6 +14836,13 @@
             </a:outerShdw>
           </a:effectLst>
         </p:spPr>
+        <p:txBody>
+          <a:bodyPr/>
+          <a:lstStyle/>
+          <a:p>
+            <a:endParaRPr lang="en-US"/>
+          </a:p>
+        </p:txBody>
       </p:sp>
       <p:sp>
         <p:nvSpPr>
@@ -14640,6 +14862,13 @@
             <a:srgbClr val="1F6FBF"/>
           </a:solidFill>
         </p:spPr>
+        <p:txBody>
+          <a:bodyPr/>
+          <a:lstStyle/>
+          <a:p>
+            <a:endParaRPr lang="en-US"/>
+          </a:p>
+        </p:txBody>
       </p:sp>
       <p:sp>
         <p:nvSpPr>
@@ -14742,6 +14971,13 @@
             </a:outerShdw>
           </a:effectLst>
         </p:spPr>
+        <p:txBody>
+          <a:bodyPr/>
+          <a:lstStyle/>
+          <a:p>
+            <a:endParaRPr lang="en-US"/>
+          </a:p>
+        </p:txBody>
       </p:sp>
       <p:sp>
         <p:nvSpPr>
@@ -14761,6 +14997,13 @@
             <a:srgbClr val="1F6FBF"/>
           </a:solidFill>
         </p:spPr>
+        <p:txBody>
+          <a:bodyPr/>
+          <a:lstStyle/>
+          <a:p>
+            <a:endParaRPr lang="en-US"/>
+          </a:p>
+        </p:txBody>
       </p:sp>
       <p:sp>
         <p:nvSpPr>
@@ -14889,6 +15132,13 @@
             <a:srgbClr val="1A3A5C"/>
           </a:solidFill>
         </p:spPr>
+        <p:txBody>
+          <a:bodyPr/>
+          <a:lstStyle/>
+          <a:p>
+            <a:endParaRPr lang="en-US"/>
+          </a:p>
+        </p:txBody>
       </p:sp>
       <p:sp>
         <p:nvSpPr>
@@ -14946,6 +15196,13 @@
             <a:srgbClr val="B8D4F0"/>
           </a:solidFill>
         </p:spPr>
+        <p:txBody>
+          <a:bodyPr/>
+          <a:lstStyle/>
+          <a:p>
+            <a:endParaRPr lang="en-US"/>
+          </a:p>
+        </p:txBody>
       </p:sp>
       <p:sp>
         <p:nvSpPr>
@@ -14972,6 +15229,13 @@
             </a:outerShdw>
           </a:effectLst>
         </p:spPr>
+        <p:txBody>
+          <a:bodyPr/>
+          <a:lstStyle/>
+          <a:p>
+            <a:endParaRPr lang="en-US"/>
+          </a:p>
+        </p:txBody>
       </p:sp>
       <p:sp>
         <p:nvSpPr>
@@ -14991,6 +15255,13 @@
             <a:srgbClr val="1F6FBF"/>
           </a:solidFill>
         </p:spPr>
+        <p:txBody>
+          <a:bodyPr/>
+          <a:lstStyle/>
+          <a:p>
+            <a:endParaRPr lang="en-US"/>
+          </a:p>
+        </p:txBody>
       </p:sp>
       <p:sp>
         <p:nvSpPr>
@@ -15131,6 +15402,13 @@
             </a:outerShdw>
           </a:effectLst>
         </p:spPr>
+        <p:txBody>
+          <a:bodyPr/>
+          <a:lstStyle/>
+          <a:p>
+            <a:endParaRPr lang="en-US"/>
+          </a:p>
+        </p:txBody>
       </p:sp>
       <p:sp>
         <p:nvSpPr>
@@ -15150,6 +15428,13 @@
             <a:srgbClr val="1F6FBF"/>
           </a:solidFill>
         </p:spPr>
+        <p:txBody>
+          <a:bodyPr/>
+          <a:lstStyle/>
+          <a:p>
+            <a:endParaRPr lang="en-US"/>
+          </a:p>
+        </p:txBody>
       </p:sp>
       <p:sp>
         <p:nvSpPr>
@@ -15290,6 +15575,13 @@
             </a:outerShdw>
           </a:effectLst>
         </p:spPr>
+        <p:txBody>
+          <a:bodyPr/>
+          <a:lstStyle/>
+          <a:p>
+            <a:endParaRPr lang="en-US"/>
+          </a:p>
+        </p:txBody>
       </p:sp>
       <p:sp>
         <p:nvSpPr>
@@ -15309,6 +15601,13 @@
             <a:srgbClr val="1F6FBF"/>
           </a:solidFill>
         </p:spPr>
+        <p:txBody>
+          <a:bodyPr/>
+          <a:lstStyle/>
+          <a:p>
+            <a:endParaRPr lang="en-US"/>
+          </a:p>
+        </p:txBody>
       </p:sp>
       <p:sp>
         <p:nvSpPr>
@@ -15449,6 +15748,13 @@
             </a:outerShdw>
           </a:effectLst>
         </p:spPr>
+        <p:txBody>
+          <a:bodyPr/>
+          <a:lstStyle/>
+          <a:p>
+            <a:endParaRPr lang="en-US"/>
+          </a:p>
+        </p:txBody>
       </p:sp>
       <p:sp>
         <p:nvSpPr>
@@ -15468,6 +15774,13 @@
             <a:srgbClr val="1F6FBF"/>
           </a:solidFill>
         </p:spPr>
+        <p:txBody>
+          <a:bodyPr/>
+          <a:lstStyle/>
+          <a:p>
+            <a:endParaRPr lang="en-US"/>
+          </a:p>
+        </p:txBody>
       </p:sp>
       <p:sp>
         <p:nvSpPr>
@@ -15601,6 +15914,13 @@
             <a:srgbClr val="B8D4F0"/>
           </a:solidFill>
         </p:spPr>
+        <p:txBody>
+          <a:bodyPr/>
+          <a:lstStyle/>
+          <a:p>
+            <a:endParaRPr lang="en-US"/>
+          </a:p>
+        </p:txBody>
       </p:sp>
       <p:sp>
         <p:nvSpPr>
@@ -15691,6 +16011,13 @@
             <a:srgbClr val="1A3A5C"/>
           </a:solidFill>
         </p:spPr>
+        <p:txBody>
+          <a:bodyPr/>
+          <a:lstStyle/>
+          <a:p>
+            <a:endParaRPr lang="en-US"/>
+          </a:p>
+        </p:txBody>
       </p:sp>
       <p:sp>
         <p:nvSpPr>
@@ -15748,6 +16075,13 @@
             <a:srgbClr val="B8D4F0"/>
           </a:solidFill>
         </p:spPr>
+        <p:txBody>
+          <a:bodyPr/>
+          <a:lstStyle/>
+          <a:p>
+            <a:endParaRPr lang="en-US"/>
+          </a:p>
+        </p:txBody>
       </p:sp>
       <p:graphicFrame>
         <p:nvGraphicFramePr>
@@ -15759,16 +16093,34 @@
         </p:nvGraphicFramePr>
         <p:xfrm>
           <a:off x="228600" y="987552"/>
-          <a:ext cx="8686800" cy="3931920"/>
+          <a:ext cx="8686800" cy="3785616"/>
         </p:xfrm>
         <a:graphic>
           <a:graphicData uri="http://schemas.openxmlformats.org/drawingml/2006/table">
             <a:tbl>
               <a:tblPr/>
               <a:tblGrid>
-                <a:gridCol w="2286000"/>
-                <a:gridCol w="1645920"/>
-                <a:gridCol w="4754880"/>
+                <a:gridCol w="2286000">
+                  <a:extLst>
+                    <a:ext uri="{9D8B030D-6E8A-4147-A177-3AD203B41FA5}">
+                      <a16:colId xmlns:a16="http://schemas.microsoft.com/office/drawing/2014/main" val="20000"/>
+                    </a:ext>
+                  </a:extLst>
+                </a:gridCol>
+                <a:gridCol w="1645920">
+                  <a:extLst>
+                    <a:ext uri="{9D8B030D-6E8A-4147-A177-3AD203B41FA5}">
+                      <a16:colId xmlns:a16="http://schemas.microsoft.com/office/drawing/2014/main" val="20001"/>
+                    </a:ext>
+                  </a:extLst>
+                </a:gridCol>
+                <a:gridCol w="4754880">
+                  <a:extLst>
+                    <a:ext uri="{9D8B030D-6E8A-4147-A177-3AD203B41FA5}">
+                      <a16:colId xmlns:a16="http://schemas.microsoft.com/office/drawing/2014/main" val="20002"/>
+                    </a:ext>
+                  </a:extLst>
+                </a:gridCol>
               </a:tblGrid>
               <a:tr h="420624">
                 <a:tc>
@@ -15975,6 +16327,11 @@
                     </a:solidFill>
                   </a:tcPr>
                 </a:tc>
+                <a:extLst>
+                  <a:ext uri="{0D108BD9-81ED-4DB2-BD59-A6C34878D82A}">
+                    <a16:rowId xmlns:a16="http://schemas.microsoft.com/office/drawing/2014/main" val="10000"/>
+                  </a:ext>
+                </a:extLst>
               </a:tr>
               <a:tr h="420624">
                 <a:tc>
@@ -16181,6 +16538,11 @@
                     </a:solidFill>
                   </a:tcPr>
                 </a:tc>
+                <a:extLst>
+                  <a:ext uri="{0D108BD9-81ED-4DB2-BD59-A6C34878D82A}">
+                    <a16:rowId xmlns:a16="http://schemas.microsoft.com/office/drawing/2014/main" val="10001"/>
+                  </a:ext>
+                </a:extLst>
               </a:tr>
               <a:tr h="420624">
                 <a:tc>
@@ -16387,6 +16749,11 @@
                     </a:solidFill>
                   </a:tcPr>
                 </a:tc>
+                <a:extLst>
+                  <a:ext uri="{0D108BD9-81ED-4DB2-BD59-A6C34878D82A}">
+                    <a16:rowId xmlns:a16="http://schemas.microsoft.com/office/drawing/2014/main" val="10002"/>
+                  </a:ext>
+                </a:extLst>
               </a:tr>
               <a:tr h="420624">
                 <a:tc>
@@ -16593,6 +16960,11 @@
                     </a:solidFill>
                   </a:tcPr>
                 </a:tc>
+                <a:extLst>
+                  <a:ext uri="{0D108BD9-81ED-4DB2-BD59-A6C34878D82A}">
+                    <a16:rowId xmlns:a16="http://schemas.microsoft.com/office/drawing/2014/main" val="10003"/>
+                  </a:ext>
+                </a:extLst>
               </a:tr>
               <a:tr h="420624">
                 <a:tc>
@@ -16799,6 +17171,11 @@
                     </a:solidFill>
                   </a:tcPr>
                 </a:tc>
+                <a:extLst>
+                  <a:ext uri="{0D108BD9-81ED-4DB2-BD59-A6C34878D82A}">
+                    <a16:rowId xmlns:a16="http://schemas.microsoft.com/office/drawing/2014/main" val="10004"/>
+                  </a:ext>
+                </a:extLst>
               </a:tr>
               <a:tr h="420624">
                 <a:tc>
@@ -17005,6 +17382,11 @@
                     </a:solidFill>
                   </a:tcPr>
                 </a:tc>
+                <a:extLst>
+                  <a:ext uri="{0D108BD9-81ED-4DB2-BD59-A6C34878D82A}">
+                    <a16:rowId xmlns:a16="http://schemas.microsoft.com/office/drawing/2014/main" val="10005"/>
+                  </a:ext>
+                </a:extLst>
               </a:tr>
               <a:tr h="420624">
                 <a:tc>
@@ -17211,6 +17593,11 @@
                     </a:solidFill>
                   </a:tcPr>
                 </a:tc>
+                <a:extLst>
+                  <a:ext uri="{0D108BD9-81ED-4DB2-BD59-A6C34878D82A}">
+                    <a16:rowId xmlns:a16="http://schemas.microsoft.com/office/drawing/2014/main" val="10006"/>
+                  </a:ext>
+                </a:extLst>
               </a:tr>
               <a:tr h="420624">
                 <a:tc>
@@ -17417,6 +17804,11 @@
                     </a:solidFill>
                   </a:tcPr>
                 </a:tc>
+                <a:extLst>
+                  <a:ext uri="{0D108BD9-81ED-4DB2-BD59-A6C34878D82A}">
+                    <a16:rowId xmlns:a16="http://schemas.microsoft.com/office/drawing/2014/main" val="10007"/>
+                  </a:ext>
+                </a:extLst>
               </a:tr>
               <a:tr h="420624">
                 <a:tc>
@@ -17623,6 +18015,11 @@
                     </a:solidFill>
                   </a:tcPr>
                 </a:tc>
+                <a:extLst>
+                  <a:ext uri="{0D108BD9-81ED-4DB2-BD59-A6C34878D82A}">
+                    <a16:rowId xmlns:a16="http://schemas.microsoft.com/office/drawing/2014/main" val="10008"/>
+                  </a:ext>
+                </a:extLst>
               </a:tr>
             </a:tbl>
           </a:graphicData>
@@ -17679,6 +18076,13 @@
             <a:srgbClr val="1A3A5C"/>
           </a:solidFill>
         </p:spPr>
+        <p:txBody>
+          <a:bodyPr/>
+          <a:lstStyle/>
+          <a:p>
+            <a:endParaRPr lang="en-US"/>
+          </a:p>
+        </p:txBody>
       </p:sp>
       <p:sp>
         <p:nvSpPr>
@@ -17736,6 +18140,13 @@
             <a:srgbClr val="B8D4F0"/>
           </a:solidFill>
         </p:spPr>
+        <p:txBody>
+          <a:bodyPr/>
+          <a:lstStyle/>
+          <a:p>
+            <a:endParaRPr lang="en-US"/>
+          </a:p>
+        </p:txBody>
       </p:sp>
       <p:sp>
         <p:nvSpPr>
@@ -17755,6 +18166,13 @@
             <a:srgbClr val="0D1B2A"/>
           </a:solidFill>
         </p:spPr>
+        <p:txBody>
+          <a:bodyPr/>
+          <a:lstStyle/>
+          <a:p>
+            <a:endParaRPr lang="en-US"/>
+          </a:p>
+        </p:txBody>
       </p:sp>
       <p:sp>
         <p:nvSpPr>
@@ -18108,6 +18526,13 @@
             </a:outerShdw>
           </a:effectLst>
         </p:spPr>
+        <p:txBody>
+          <a:bodyPr/>
+          <a:lstStyle/>
+          <a:p>
+            <a:endParaRPr lang="en-US"/>
+          </a:p>
+        </p:txBody>
       </p:sp>
       <p:sp>
         <p:nvSpPr>
@@ -18127,6 +18552,13 @@
             <a:srgbClr val="4A90D9"/>
           </a:solidFill>
         </p:spPr>
+        <p:txBody>
+          <a:bodyPr/>
+          <a:lstStyle/>
+          <a:p>
+            <a:endParaRPr lang="en-US"/>
+          </a:p>
+        </p:txBody>
       </p:sp>
       <p:sp>
         <p:nvSpPr>
@@ -18229,6 +18661,13 @@
             </a:outerShdw>
           </a:effectLst>
         </p:spPr>
+        <p:txBody>
+          <a:bodyPr/>
+          <a:lstStyle/>
+          <a:p>
+            <a:endParaRPr lang="en-US"/>
+          </a:p>
+        </p:txBody>
       </p:sp>
       <p:sp>
         <p:nvSpPr>
@@ -18248,6 +18687,13 @@
             <a:srgbClr val="4A90D9"/>
           </a:solidFill>
         </p:spPr>
+        <p:txBody>
+          <a:bodyPr/>
+          <a:lstStyle/>
+          <a:p>
+            <a:endParaRPr lang="en-US"/>
+          </a:p>
+        </p:txBody>
       </p:sp>
       <p:sp>
         <p:nvSpPr>
@@ -18350,6 +18796,13 @@
             </a:outerShdw>
           </a:effectLst>
         </p:spPr>
+        <p:txBody>
+          <a:bodyPr/>
+          <a:lstStyle/>
+          <a:p>
+            <a:endParaRPr lang="en-US"/>
+          </a:p>
+        </p:txBody>
       </p:sp>
       <p:sp>
         <p:nvSpPr>
@@ -18369,6 +18822,13 @@
             <a:srgbClr val="4A90D9"/>
           </a:solidFill>
         </p:spPr>
+        <p:txBody>
+          <a:bodyPr/>
+          <a:lstStyle/>
+          <a:p>
+            <a:endParaRPr lang="en-US"/>
+          </a:p>
+        </p:txBody>
       </p:sp>
       <p:sp>
         <p:nvSpPr>
@@ -18471,6 +18931,13 @@
             </a:outerShdw>
           </a:effectLst>
         </p:spPr>
+        <p:txBody>
+          <a:bodyPr/>
+          <a:lstStyle/>
+          <a:p>
+            <a:endParaRPr lang="en-US"/>
+          </a:p>
+        </p:txBody>
       </p:sp>
       <p:sp>
         <p:nvSpPr>
@@ -18490,6 +18957,13 @@
             <a:srgbClr val="4A90D9"/>
           </a:solidFill>
         </p:spPr>
+        <p:txBody>
+          <a:bodyPr/>
+          <a:lstStyle/>
+          <a:p>
+            <a:endParaRPr lang="en-US"/>
+          </a:p>
+        </p:txBody>
       </p:sp>
       <p:sp>
         <p:nvSpPr>
@@ -18592,6 +19066,13 @@
             </a:outerShdw>
           </a:effectLst>
         </p:spPr>
+        <p:txBody>
+          <a:bodyPr/>
+          <a:lstStyle/>
+          <a:p>
+            <a:endParaRPr lang="en-US"/>
+          </a:p>
+        </p:txBody>
       </p:sp>
       <p:sp>
         <p:nvSpPr>
@@ -18611,6 +19092,13 @@
             <a:srgbClr val="4A90D9"/>
           </a:solidFill>
         </p:spPr>
+        <p:txBody>
+          <a:bodyPr/>
+          <a:lstStyle/>
+          <a:p>
+            <a:endParaRPr lang="en-US"/>
+          </a:p>
+        </p:txBody>
       </p:sp>
       <p:sp>
         <p:nvSpPr>
@@ -18947,6 +19435,8 @@
       </a:bgFillStyleLst>
     </a:fmtScheme>
   </a:themeElements>
+  <a:objectDefaults/>
+  <a:extraClrSchemeLst/>
   <a:extLst>
     <a:ext uri="{05A4C25C-085E-4340-85A3-A5531E510DB2}">
       <thm15:themeFamily xmlns:thm15="http://schemas.microsoft.com/office/thememl/2012/main" name="Office Theme" id="{62F939B6-93AF-4DB8-9C6B-D6C7DFDC589F}" vid="{4A3C46E8-61CC-4603-A589-7422A47A8E4A}"/>
@@ -19206,6 +19696,8 @@
       </a:bgFillStyleLst>
     </a:fmtScheme>
   </a:themeElements>
+  <a:objectDefaults/>
+  <a:extraClrSchemeLst/>
   <a:extLst>
     <a:ext uri="{05A4C25C-085E-4340-85A3-A5531E510DB2}">
       <thm15:themeFamily xmlns:thm15="http://schemas.microsoft.com/office/thememl/2012/main" name="Office Theme" id="{62F939B6-93AF-4DB8-9C6B-D6C7DFDC589F}" vid="{4A3C46E8-61CC-4603-A589-7422A47A8E4A}"/>
